--- a/98-supp_material/intermediate_results_20260325.pptx
+++ b/98-supp_material/intermediate_results_20260325.pptx
@@ -5,27 +5,21 @@
     <p:sldMasterId id="2147483648" r:id="rId1"/>
   </p:sldMasterIdLst>
   <p:notesMasterIdLst>
-    <p:notesMasterId r:id="rId20"/>
+    <p:notesMasterId r:id="rId14"/>
   </p:notesMasterIdLst>
   <p:sldIdLst>
     <p:sldId id="256" r:id="rId2"/>
     <p:sldId id="257" r:id="rId3"/>
-    <p:sldId id="258" r:id="rId4"/>
-    <p:sldId id="262" r:id="rId5"/>
-    <p:sldId id="267" r:id="rId6"/>
-    <p:sldId id="268" r:id="rId7"/>
-    <p:sldId id="259" r:id="rId8"/>
-    <p:sldId id="261" r:id="rId9"/>
-    <p:sldId id="260" r:id="rId10"/>
-    <p:sldId id="263" r:id="rId11"/>
-    <p:sldId id="269" r:id="rId12"/>
-    <p:sldId id="270" r:id="rId13"/>
-    <p:sldId id="264" r:id="rId14"/>
-    <p:sldId id="265" r:id="rId15"/>
-    <p:sldId id="266" r:id="rId16"/>
-    <p:sldId id="271" r:id="rId17"/>
-    <p:sldId id="272" r:id="rId18"/>
-    <p:sldId id="273" r:id="rId19"/>
+    <p:sldId id="267" r:id="rId4"/>
+    <p:sldId id="268" r:id="rId5"/>
+    <p:sldId id="259" r:id="rId6"/>
+    <p:sldId id="261" r:id="rId7"/>
+    <p:sldId id="269" r:id="rId8"/>
+    <p:sldId id="270" r:id="rId9"/>
+    <p:sldId id="264" r:id="rId10"/>
+    <p:sldId id="271" r:id="rId11"/>
+    <p:sldId id="272" r:id="rId12"/>
+    <p:sldId id="273" r:id="rId13"/>
   </p:sldIdLst>
   <p:sldSz cx="12192000" cy="6858000"/>
   <p:notesSz cx="6858000" cy="9144000"/>
@@ -132,20 +126,12 @@
 </p:presentation>
 </file>
 
-<file path=ppt/revisionInfo.xml><?xml version="1.0" encoding="utf-8"?>
-<p1510:revInfo xmlns:a="http://schemas.openxmlformats.org/drawingml/2006/main" xmlns:r="http://schemas.openxmlformats.org/officeDocument/2006/relationships" xmlns:p1510="http://schemas.microsoft.com/office/powerpoint/2015/10/main">
-  <p1510:revLst>
-    <p1510:client id="{EDC8BBF8-F37D-4D08-96D0-CF42D4015D1A}" v="303" dt="2026-03-25T07:43:11.973"/>
-  </p1510:revLst>
-</p1510:revInfo>
-</file>
-
 <file path=ppt/changesInfos/changesInfo1.xml><?xml version="1.0" encoding="utf-8"?>
 <pc:chgInfo xmlns:a="http://schemas.openxmlformats.org/drawingml/2006/main" xmlns:r="http://schemas.openxmlformats.org/officeDocument/2006/relationships" xmlns:ac="http://schemas.microsoft.com/office/drawing/2013/main/command" xmlns:pc="http://schemas.microsoft.com/office/powerpoint/2013/main/command">
   <pc:docChgLst>
     <pc:chgData name="Mariam Rahali Masbouri" userId="94d9c504-ac90-48e2-8e71-5e2500073cbc" providerId="ADAL" clId="{35871E9E-6380-4BD0-A089-0CA31C4DDA85}"/>
-    <pc:docChg chg="undo custSel addSld modSld sldOrd">
-      <pc:chgData name="Mariam Rahali Masbouri" userId="94d9c504-ac90-48e2-8e71-5e2500073cbc" providerId="ADAL" clId="{35871E9E-6380-4BD0-A089-0CA31C4DDA85}" dt="2026-03-25T12:17:13.498" v="6006" actId="20577"/>
+    <pc:docChg chg="undo custSel addSld delSld modSld sldOrd">
+      <pc:chgData name="Mariam Rahali Masbouri" userId="94d9c504-ac90-48e2-8e71-5e2500073cbc" providerId="ADAL" clId="{35871E9E-6380-4BD0-A089-0CA31C4DDA85}" dt="2026-03-26T07:59:17.891" v="6080" actId="20577"/>
       <pc:docMkLst>
         <pc:docMk/>
       </pc:docMkLst>
@@ -234,14 +220,6 @@
             <ac:spMk id="9" creationId="{7D558111-7359-CF13-C0D3-F36B980E4A93}"/>
           </ac:spMkLst>
         </pc:spChg>
-        <pc:picChg chg="add del mod modCrop">
-          <ac:chgData name="Mariam Rahali Masbouri" userId="94d9c504-ac90-48e2-8e71-5e2500073cbc" providerId="ADAL" clId="{35871E9E-6380-4BD0-A089-0CA31C4DDA85}" dt="2026-03-24T07:12:05.452" v="1310" actId="478"/>
-          <ac:picMkLst>
-            <pc:docMk/>
-            <pc:sldMk cId="749989772" sldId="257"/>
-            <ac:picMk id="8" creationId="{12234D64-84D8-C078-6E31-DFEFF1A97452}"/>
-          </ac:picMkLst>
-        </pc:picChg>
         <pc:picChg chg="add mod">
           <ac:chgData name="Mariam Rahali Masbouri" userId="94d9c504-ac90-48e2-8e71-5e2500073cbc" providerId="ADAL" clId="{35871E9E-6380-4BD0-A089-0CA31C4DDA85}" dt="2026-03-24T07:12:26.226" v="1359" actId="1076"/>
           <ac:picMkLst>
@@ -251,8 +229,8 @@
           </ac:picMkLst>
         </pc:picChg>
       </pc:sldChg>
-      <pc:sldChg chg="addSp delSp modSp add mod">
-        <pc:chgData name="Mariam Rahali Masbouri" userId="94d9c504-ac90-48e2-8e71-5e2500073cbc" providerId="ADAL" clId="{35871E9E-6380-4BD0-A089-0CA31C4DDA85}" dt="2026-03-25T06:59:46.719" v="3393" actId="20577"/>
+      <pc:sldChg chg="addSp delSp modSp add del mod">
+        <pc:chgData name="Mariam Rahali Masbouri" userId="94d9c504-ac90-48e2-8e71-5e2500073cbc" providerId="ADAL" clId="{35871E9E-6380-4BD0-A089-0CA31C4DDA85}" dt="2026-03-26T07:58:41.641" v="6007" actId="47"/>
         <pc:sldMkLst>
           <pc:docMk/>
           <pc:sldMk cId="1332141955" sldId="258"/>
@@ -265,38 +243,6 @@
             <ac:spMk id="3" creationId="{AEA9F212-7648-F8B6-F195-D8DBD3BAA184}"/>
           </ac:spMkLst>
         </pc:spChg>
-        <pc:spChg chg="add mod">
-          <ac:chgData name="Mariam Rahali Masbouri" userId="94d9c504-ac90-48e2-8e71-5e2500073cbc" providerId="ADAL" clId="{35871E9E-6380-4BD0-A089-0CA31C4DDA85}" dt="2026-03-24T07:20:01.487" v="1645" actId="1076"/>
-          <ac:spMkLst>
-            <pc:docMk/>
-            <pc:sldMk cId="1332141955" sldId="258"/>
-            <ac:spMk id="4" creationId="{CA4F7170-6C56-5ECE-3F9C-6A237B776744}"/>
-          </ac:spMkLst>
-        </pc:spChg>
-        <pc:spChg chg="add mod">
-          <ac:chgData name="Mariam Rahali Masbouri" userId="94d9c504-ac90-48e2-8e71-5e2500073cbc" providerId="ADAL" clId="{35871E9E-6380-4BD0-A089-0CA31C4DDA85}" dt="2026-03-24T11:23:51.521" v="2008" actId="20577"/>
-          <ac:spMkLst>
-            <pc:docMk/>
-            <pc:sldMk cId="1332141955" sldId="258"/>
-            <ac:spMk id="5" creationId="{07DCC246-569A-4AEF-7FE4-FF01555C724F}"/>
-          </ac:spMkLst>
-        </pc:spChg>
-        <pc:picChg chg="add mod">
-          <ac:chgData name="Mariam Rahali Masbouri" userId="94d9c504-ac90-48e2-8e71-5e2500073cbc" providerId="ADAL" clId="{35871E9E-6380-4BD0-A089-0CA31C4DDA85}" dt="2026-03-23T20:56:27.905" v="442" actId="1076"/>
-          <ac:picMkLst>
-            <pc:docMk/>
-            <pc:sldMk cId="1332141955" sldId="258"/>
-            <ac:picMk id="1026" creationId="{301B7F09-094B-4157-B891-FF19B5BE586A}"/>
-          </ac:picMkLst>
-        </pc:picChg>
-        <pc:picChg chg="add mod">
-          <ac:chgData name="Mariam Rahali Masbouri" userId="94d9c504-ac90-48e2-8e71-5e2500073cbc" providerId="ADAL" clId="{35871E9E-6380-4BD0-A089-0CA31C4DDA85}" dt="2026-03-23T21:02:51.017" v="771" actId="1076"/>
-          <ac:picMkLst>
-            <pc:docMk/>
-            <pc:sldMk cId="1332141955" sldId="258"/>
-            <ac:picMk id="1028" creationId="{7316BD46-60E9-08C0-D580-D7F5C684D77A}"/>
-          </ac:picMkLst>
-        </pc:picChg>
       </pc:sldChg>
       <pc:sldChg chg="addSp delSp modSp add mod ord">
         <pc:chgData name="Mariam Rahali Masbouri" userId="94d9c504-ac90-48e2-8e71-5e2500073cbc" providerId="ADAL" clId="{35871E9E-6380-4BD0-A089-0CA31C4DDA85}" dt="2026-03-25T07:13:19.309" v="3828" actId="20577"/>
@@ -353,20 +299,12 @@
           </ac:picMkLst>
         </pc:picChg>
       </pc:sldChg>
-      <pc:sldChg chg="addSp delSp modSp add mod ord">
-        <pc:chgData name="Mariam Rahali Masbouri" userId="94d9c504-ac90-48e2-8e71-5e2500073cbc" providerId="ADAL" clId="{35871E9E-6380-4BD0-A089-0CA31C4DDA85}" dt="2026-03-25T07:26:14.095" v="4506" actId="1076"/>
+      <pc:sldChg chg="addSp delSp modSp add del mod ord">
+        <pc:chgData name="Mariam Rahali Masbouri" userId="94d9c504-ac90-48e2-8e71-5e2500073cbc" providerId="ADAL" clId="{35871E9E-6380-4BD0-A089-0CA31C4DDA85}" dt="2026-03-26T07:58:47.030" v="6009" actId="47"/>
         <pc:sldMkLst>
           <pc:docMk/>
           <pc:sldMk cId="2646711145" sldId="260"/>
         </pc:sldMkLst>
-        <pc:spChg chg="mod">
-          <ac:chgData name="Mariam Rahali Masbouri" userId="94d9c504-ac90-48e2-8e71-5e2500073cbc" providerId="ADAL" clId="{35871E9E-6380-4BD0-A089-0CA31C4DDA85}" dt="2026-03-23T21:07:31.354" v="858" actId="20577"/>
-          <ac:spMkLst>
-            <pc:docMk/>
-            <pc:sldMk cId="2646711145" sldId="260"/>
-            <ac:spMk id="2" creationId="{25E2DF66-7EC7-9642-42C6-AA3244FF293F}"/>
-          </ac:spMkLst>
-        </pc:spChg>
         <pc:spChg chg="add mod">
           <ac:chgData name="Mariam Rahali Masbouri" userId="94d9c504-ac90-48e2-8e71-5e2500073cbc" providerId="ADAL" clId="{35871E9E-6380-4BD0-A089-0CA31C4DDA85}" dt="2026-03-25T07:24:29.645" v="4322" actId="13926"/>
           <ac:spMkLst>
@@ -391,22 +329,6 @@
             <ac:spMk id="5" creationId="{0286D042-D30D-E25E-48A8-CF7C83DAA9C9}"/>
           </ac:spMkLst>
         </pc:spChg>
-        <pc:picChg chg="add mod">
-          <ac:chgData name="Mariam Rahali Masbouri" userId="94d9c504-ac90-48e2-8e71-5e2500073cbc" providerId="ADAL" clId="{35871E9E-6380-4BD0-A089-0CA31C4DDA85}" dt="2026-03-23T21:10:04.092" v="888" actId="1076"/>
-          <ac:picMkLst>
-            <pc:docMk/>
-            <pc:sldMk cId="2646711145" sldId="260"/>
-            <ac:picMk id="4102" creationId="{799AB428-9642-69D6-0ACA-36F18C22C3C1}"/>
-          </ac:picMkLst>
-        </pc:picChg>
-        <pc:picChg chg="add mod">
-          <ac:chgData name="Mariam Rahali Masbouri" userId="94d9c504-ac90-48e2-8e71-5e2500073cbc" providerId="ADAL" clId="{35871E9E-6380-4BD0-A089-0CA31C4DDA85}" dt="2026-03-23T21:11:27.445" v="940" actId="1076"/>
-          <ac:picMkLst>
-            <pc:docMk/>
-            <pc:sldMk cId="2646711145" sldId="260"/>
-            <ac:picMk id="4104" creationId="{23AC904C-12B3-F5AD-E334-3D22D9FF57E1}"/>
-          </ac:picMkLst>
-        </pc:picChg>
       </pc:sldChg>
       <pc:sldChg chg="addSp delSp modSp add mod ord">
         <pc:chgData name="Mariam Rahali Masbouri" userId="94d9c504-ac90-48e2-8e71-5e2500073cbc" providerId="ADAL" clId="{35871E9E-6380-4BD0-A089-0CA31C4DDA85}" dt="2026-03-25T07:17:02.245" v="3939" actId="20577"/>
@@ -439,103 +361,15 @@
           </ac:picMkLst>
         </pc:picChg>
       </pc:sldChg>
-      <pc:sldChg chg="addSp delSp modSp add mod modNotesTx">
-        <pc:chgData name="Mariam Rahali Masbouri" userId="94d9c504-ac90-48e2-8e71-5e2500073cbc" providerId="ADAL" clId="{35871E9E-6380-4BD0-A089-0CA31C4DDA85}" dt="2026-03-24T13:30:38.881" v="3292" actId="20577"/>
+      <pc:sldChg chg="addSp delSp modSp add del mod modNotesTx">
+        <pc:chgData name="Mariam Rahali Masbouri" userId="94d9c504-ac90-48e2-8e71-5e2500073cbc" providerId="ADAL" clId="{35871E9E-6380-4BD0-A089-0CA31C4DDA85}" dt="2026-03-26T07:58:42.789" v="6008" actId="47"/>
         <pc:sldMkLst>
           <pc:docMk/>
           <pc:sldMk cId="303723884" sldId="262"/>
         </pc:sldMkLst>
-        <pc:spChg chg="mod">
-          <ac:chgData name="Mariam Rahali Masbouri" userId="94d9c504-ac90-48e2-8e71-5e2500073cbc" providerId="ADAL" clId="{35871E9E-6380-4BD0-A089-0CA31C4DDA85}" dt="2026-03-23T21:05:16.596" v="833" actId="20577"/>
-          <ac:spMkLst>
-            <pc:docMk/>
-            <pc:sldMk cId="303723884" sldId="262"/>
-            <ac:spMk id="2" creationId="{FBC84651-B0A3-009F-96AF-AB332FA4C7DE}"/>
-          </ac:spMkLst>
-        </pc:spChg>
-        <pc:spChg chg="add mod">
-          <ac:chgData name="Mariam Rahali Masbouri" userId="94d9c504-ac90-48e2-8e71-5e2500073cbc" providerId="ADAL" clId="{35871E9E-6380-4BD0-A089-0CA31C4DDA85}" dt="2026-03-24T13:27:15.760" v="2927" actId="1076"/>
-          <ac:spMkLst>
-            <pc:docMk/>
-            <pc:sldMk cId="303723884" sldId="262"/>
-            <ac:spMk id="3" creationId="{B76B4ED6-0E93-5703-072E-542C27B35C3F}"/>
-          </ac:spMkLst>
-        </pc:spChg>
-        <pc:spChg chg="add mod">
-          <ac:chgData name="Mariam Rahali Masbouri" userId="94d9c504-ac90-48e2-8e71-5e2500073cbc" providerId="ADAL" clId="{35871E9E-6380-4BD0-A089-0CA31C4DDA85}" dt="2026-03-24T12:29:27.607" v="2513" actId="1076"/>
-          <ac:spMkLst>
-            <pc:docMk/>
-            <pc:sldMk cId="303723884" sldId="262"/>
-            <ac:spMk id="4" creationId="{2293FB24-706E-4F9D-2061-AE22908AE877}"/>
-          </ac:spMkLst>
-        </pc:spChg>
-        <pc:spChg chg="add">
-          <ac:chgData name="Mariam Rahali Masbouri" userId="94d9c504-ac90-48e2-8e71-5e2500073cbc" providerId="ADAL" clId="{35871E9E-6380-4BD0-A089-0CA31C4DDA85}" dt="2026-03-24T11:57:35.212" v="2208"/>
-          <ac:spMkLst>
-            <pc:docMk/>
-            <pc:sldMk cId="303723884" sldId="262"/>
-            <ac:spMk id="5" creationId="{A4B3FF21-D895-72B7-C02C-555187E659D0}"/>
-          </ac:spMkLst>
-        </pc:spChg>
-        <pc:spChg chg="add del mod">
-          <ac:chgData name="Mariam Rahali Masbouri" userId="94d9c504-ac90-48e2-8e71-5e2500073cbc" providerId="ADAL" clId="{35871E9E-6380-4BD0-A089-0CA31C4DDA85}" dt="2026-03-24T12:24:50.057" v="2502"/>
-          <ac:spMkLst>
-            <pc:docMk/>
-            <pc:sldMk cId="303723884" sldId="262"/>
-            <ac:spMk id="6" creationId="{F8E9B90C-4CE6-8C44-A9A0-1B0E8ACCEBE9}"/>
-          </ac:spMkLst>
-        </pc:spChg>
-        <pc:spChg chg="add">
-          <ac:chgData name="Mariam Rahali Masbouri" userId="94d9c504-ac90-48e2-8e71-5e2500073cbc" providerId="ADAL" clId="{35871E9E-6380-4BD0-A089-0CA31C4DDA85}" dt="2026-03-24T11:57:46.463" v="2210"/>
-          <ac:spMkLst>
-            <pc:docMk/>
-            <pc:sldMk cId="303723884" sldId="262"/>
-            <ac:spMk id="7" creationId="{1DE33E99-16A2-5176-B070-47881EFCAFD9}"/>
-          </ac:spMkLst>
-        </pc:spChg>
-        <pc:spChg chg="add">
-          <ac:chgData name="Mariam Rahali Masbouri" userId="94d9c504-ac90-48e2-8e71-5e2500073cbc" providerId="ADAL" clId="{35871E9E-6380-4BD0-A089-0CA31C4DDA85}" dt="2026-03-24T11:58:11.281" v="2217"/>
-          <ac:spMkLst>
-            <pc:docMk/>
-            <pc:sldMk cId="303723884" sldId="262"/>
-            <ac:spMk id="8" creationId="{0E8241E6-9244-90A1-A4BC-CE30DAF15B60}"/>
-          </ac:spMkLst>
-        </pc:spChg>
-        <pc:spChg chg="add">
-          <ac:chgData name="Mariam Rahali Masbouri" userId="94d9c504-ac90-48e2-8e71-5e2500073cbc" providerId="ADAL" clId="{35871E9E-6380-4BD0-A089-0CA31C4DDA85}" dt="2026-03-24T11:58:31.997" v="2220"/>
-          <ac:spMkLst>
-            <pc:docMk/>
-            <pc:sldMk cId="303723884" sldId="262"/>
-            <ac:spMk id="9" creationId="{B33DA3AD-A022-6456-9100-E923F39E4C4C}"/>
-          </ac:spMkLst>
-        </pc:spChg>
-        <pc:spChg chg="add mod">
-          <ac:chgData name="Mariam Rahali Masbouri" userId="94d9c504-ac90-48e2-8e71-5e2500073cbc" providerId="ADAL" clId="{35871E9E-6380-4BD0-A089-0CA31C4DDA85}" dt="2026-03-24T13:27:20.231" v="2928" actId="1076"/>
-          <ac:spMkLst>
-            <pc:docMk/>
-            <pc:sldMk cId="303723884" sldId="262"/>
-            <ac:spMk id="10" creationId="{FB53E0B1-5140-D22E-279B-5277C4F1AFA9}"/>
-          </ac:spMkLst>
-        </pc:spChg>
-        <pc:picChg chg="add mod">
-          <ac:chgData name="Mariam Rahali Masbouri" userId="94d9c504-ac90-48e2-8e71-5e2500073cbc" providerId="ADAL" clId="{35871E9E-6380-4BD0-A089-0CA31C4DDA85}" dt="2026-03-24T11:44:46.198" v="2134" actId="1076"/>
-          <ac:picMkLst>
-            <pc:docMk/>
-            <pc:sldMk cId="303723884" sldId="262"/>
-            <ac:picMk id="6146" creationId="{0C741AD3-001B-7A01-8BBD-F9086B8D57E9}"/>
-          </ac:picMkLst>
-        </pc:picChg>
-        <pc:picChg chg="add mod">
-          <ac:chgData name="Mariam Rahali Masbouri" userId="94d9c504-ac90-48e2-8e71-5e2500073cbc" providerId="ADAL" clId="{35871E9E-6380-4BD0-A089-0CA31C4DDA85}" dt="2026-03-24T11:44:54.247" v="2137" actId="1076"/>
-          <ac:picMkLst>
-            <pc:docMk/>
-            <pc:sldMk cId="303723884" sldId="262"/>
-            <ac:picMk id="6148" creationId="{CFE13712-8DD6-8DD4-AC95-63FF9E7AAE96}"/>
-          </ac:picMkLst>
-        </pc:picChg>
       </pc:sldChg>
-      <pc:sldChg chg="addSp delSp modSp add mod">
-        <pc:chgData name="Mariam Rahali Masbouri" userId="94d9c504-ac90-48e2-8e71-5e2500073cbc" providerId="ADAL" clId="{35871E9E-6380-4BD0-A089-0CA31C4DDA85}" dt="2026-03-25T07:28:49.449" v="4763" actId="1076"/>
+      <pc:sldChg chg="addSp delSp modSp add del mod">
+        <pc:chgData name="Mariam Rahali Masbouri" userId="94d9c504-ac90-48e2-8e71-5e2500073cbc" providerId="ADAL" clId="{35871E9E-6380-4BD0-A089-0CA31C4DDA85}" dt="2026-03-26T07:58:47.877" v="6010" actId="47"/>
         <pc:sldMkLst>
           <pc:docMk/>
           <pc:sldMk cId="1799677316" sldId="263"/>
@@ -628,8 +462,8 @@
           </ac:picMkLst>
         </pc:picChg>
       </pc:sldChg>
-      <pc:sldChg chg="addSp delSp modSp add mod ord">
-        <pc:chgData name="Mariam Rahali Masbouri" userId="94d9c504-ac90-48e2-8e71-5e2500073cbc" providerId="ADAL" clId="{35871E9E-6380-4BD0-A089-0CA31C4DDA85}" dt="2026-03-25T07:34:31.984" v="5189" actId="13926"/>
+      <pc:sldChg chg="addSp delSp modSp add del mod ord">
+        <pc:chgData name="Mariam Rahali Masbouri" userId="94d9c504-ac90-48e2-8e71-5e2500073cbc" providerId="ADAL" clId="{35871E9E-6380-4BD0-A089-0CA31C4DDA85}" dt="2026-03-26T07:58:50.915" v="6011" actId="47"/>
         <pc:sldMkLst>
           <pc:docMk/>
           <pc:sldMk cId="3469520601" sldId="265"/>
@@ -683,8 +517,8 @@
           </ac:picMkLst>
         </pc:picChg>
       </pc:sldChg>
-      <pc:sldChg chg="addSp delSp modSp add mod">
-        <pc:chgData name="Mariam Rahali Masbouri" userId="94d9c504-ac90-48e2-8e71-5e2500073cbc" providerId="ADAL" clId="{35871E9E-6380-4BD0-A089-0CA31C4DDA85}" dt="2026-03-25T07:36:22.696" v="5350" actId="1076"/>
+      <pc:sldChg chg="addSp delSp modSp add del mod">
+        <pc:chgData name="Mariam Rahali Masbouri" userId="94d9c504-ac90-48e2-8e71-5e2500073cbc" providerId="ADAL" clId="{35871E9E-6380-4BD0-A089-0CA31C4DDA85}" dt="2026-03-26T07:58:52.020" v="6012" actId="47"/>
         <pc:sldMkLst>
           <pc:docMk/>
           <pc:sldMk cId="1881367386" sldId="266"/>
@@ -738,8 +572,8 @@
           </ac:picMkLst>
         </pc:picChg>
       </pc:sldChg>
-      <pc:sldChg chg="addSp delSp modSp add mod ord">
-        <pc:chgData name="Mariam Rahali Masbouri" userId="94d9c504-ac90-48e2-8e71-5e2500073cbc" providerId="ADAL" clId="{35871E9E-6380-4BD0-A089-0CA31C4DDA85}" dt="2026-03-25T07:22:14.131" v="4145" actId="20577"/>
+      <pc:sldChg chg="addSp delSp modSp add mod ord modNotesTx">
+        <pc:chgData name="Mariam Rahali Masbouri" userId="94d9c504-ac90-48e2-8e71-5e2500073cbc" providerId="ADAL" clId="{35871E9E-6380-4BD0-A089-0CA31C4DDA85}" dt="2026-03-26T07:59:17.891" v="6080" actId="20577"/>
         <pc:sldMkLst>
           <pc:docMk/>
           <pc:sldMk cId="3200976542" sldId="267"/>
@@ -1250,7 +1084,7 @@
           <a:p>
             <a:fld id="{FAF02046-E0D4-4277-94E6-706763EE4481}" type="datetimeFigureOut">
               <a:rPr lang="en-US" smtClean="0"/>
-              <a:t>3/25/2026</a:t>
+              <a:t>3/26/2026</a:t>
             </a:fld>
             <a:endParaRPr lang="en-US"/>
           </a:p>
@@ -1849,122 +1683,15 @@
           <a:bodyPr/>
           <a:lstStyle/>
           <a:p>
-            <a:pPr marL="0" marR="0" lvl="0" indent="0" algn="l" defTabSz="914400" rtl="0" eaLnBrk="1" fontAlgn="auto" latinLnBrk="0" hangingPunct="1">
-              <a:lnSpc>
-                <a:spcPct val="100000"/>
-              </a:lnSpc>
-              <a:spcBef>
-                <a:spcPts val="0"/>
-              </a:spcBef>
-              <a:spcAft>
-                <a:spcPts val="0"/>
-              </a:spcAft>
-              <a:buClrTx/>
-              <a:buSzTx/>
-              <a:buFontTx/>
-              <a:buNone/>
-              <a:tabLst/>
-              <a:defRPr/>
-            </a:pPr>
-            <a:r>
-              <a:rPr lang="en-US" sz="1200" dirty="0"/>
-              <a:t>Hypothesis: Changes in PEP are due to negative interactions that occur between rarer taxa, lost in uneven data.</a:t>
-            </a:r>
-          </a:p>
-          <a:p>
-            <a:pPr marL="0" marR="0" lvl="0" indent="0" algn="l" defTabSz="914400" rtl="0" eaLnBrk="1" fontAlgn="auto" latinLnBrk="0" hangingPunct="1">
-              <a:lnSpc>
-                <a:spcPct val="100000"/>
-              </a:lnSpc>
-              <a:spcBef>
-                <a:spcPts val="0"/>
-              </a:spcBef>
-              <a:spcAft>
-                <a:spcPts val="0"/>
-              </a:spcAft>
-              <a:buClrTx/>
-              <a:buSzTx/>
-              <a:buFontTx/>
-              <a:buNone/>
-              <a:tabLst/>
-              <a:defRPr/>
-            </a:pPr>
-            <a:endParaRPr lang="en-US" sz="1200" dirty="0"/>
-          </a:p>
-          <a:p>
-            <a:pPr marL="0" marR="0" lvl="0" indent="0" algn="l" defTabSz="914400" rtl="0" eaLnBrk="1" fontAlgn="auto" latinLnBrk="0" hangingPunct="1">
-              <a:lnSpc>
-                <a:spcPct val="100000"/>
-              </a:lnSpc>
-              <a:spcBef>
-                <a:spcPts val="0"/>
-              </a:spcBef>
-              <a:spcAft>
-                <a:spcPts val="0"/>
-              </a:spcAft>
-              <a:buClrTx/>
-              <a:buSzTx/>
-              <a:buFontTx/>
-              <a:buNone/>
-              <a:tabLst/>
-              <a:defRPr/>
-            </a:pPr>
-            <a:r>
-              <a:rPr lang="en-US" sz="1200" dirty="0"/>
-              <a:t>My guess is that rare taxa have negative interactions with dominant species, and positive interactions between themselves (with cross-feeding, for example).</a:t>
-            </a:r>
-          </a:p>
-          <a:p>
-            <a:pPr marL="0" marR="0" lvl="0" indent="0" algn="l" defTabSz="914400" rtl="0" eaLnBrk="1" fontAlgn="auto" latinLnBrk="0" hangingPunct="1">
-              <a:lnSpc>
-                <a:spcPct val="100000"/>
-              </a:lnSpc>
-              <a:spcBef>
-                <a:spcPts val="0"/>
-              </a:spcBef>
-              <a:spcAft>
-                <a:spcPts val="0"/>
-              </a:spcAft>
-              <a:buClrTx/>
-              <a:buSzTx/>
-              <a:buFontTx/>
-              <a:buNone/>
-              <a:tabLst/>
-              <a:defRPr/>
-            </a:pPr>
-            <a:endParaRPr lang="en-US" sz="1200" dirty="0"/>
-          </a:p>
-          <a:p>
-            <a:pPr marL="0" marR="0" lvl="0" indent="0" algn="l" defTabSz="914400" rtl="0" eaLnBrk="1" fontAlgn="auto" latinLnBrk="0" hangingPunct="1">
-              <a:lnSpc>
-                <a:spcPct val="100000"/>
-              </a:lnSpc>
-              <a:spcBef>
-                <a:spcPts val="0"/>
-              </a:spcBef>
-              <a:spcAft>
-                <a:spcPts val="0"/>
-              </a:spcAft>
-              <a:buClrTx/>
-              <a:buSzTx/>
-              <a:buFontTx/>
-              <a:buNone/>
-              <a:tabLst/>
-              <a:defRPr/>
-            </a:pPr>
-            <a:r>
-              <a:rPr lang="en-US" sz="1200" dirty="0"/>
-              <a:t>This would reinforce their findings, since if we had enough sequencing depth, we might have been able to spot more rare taxa and thus the PEP for diseased would have been higher.</a:t>
-            </a:r>
-          </a:p>
-          <a:p>
+            <a:r>
+              <a:rPr lang="en-US" dirty="0"/>
+              <a:t>For all datasets, evenness was computed before </a:t>
+            </a:r>
+            <a:r>
+              <a:rPr lang="en-US"/>
+              <a:t>prevalence filtering!</a:t>
+            </a:r>
             <a:endParaRPr lang="en-US" dirty="0"/>
-          </a:p>
-          <a:p>
-            <a:r>
-              <a:rPr lang="en-US" dirty="0"/>
-              <a:t>TODO: Find another IBD dataset and run the network again.</a:t>
-            </a:r>
           </a:p>
         </p:txBody>
       </p:sp>
@@ -1985,7 +1712,7 @@
           <a:p>
             <a:fld id="{F60FF669-7D96-4648-B4B5-F42C727F33EE}" type="slidenum">
               <a:rPr lang="en-US" smtClean="0"/>
-              <a:t>4</a:t>
+              <a:t>3</a:t>
             </a:fld>
             <a:endParaRPr lang="en-US"/>
           </a:p>
@@ -1994,7 +1721,7 @@
     </p:spTree>
     <p:extLst>
       <p:ext uri="{BB962C8B-B14F-4D97-AF65-F5344CB8AC3E}">
-        <p14:creationId xmlns:p14="http://schemas.microsoft.com/office/powerpoint/2010/main" val="1648998953"/>
+        <p14:creationId xmlns:p14="http://schemas.microsoft.com/office/powerpoint/2010/main" val="3198100442"/>
       </p:ext>
     </p:extLst>
   </p:cSld>
@@ -2208,7 +1935,7 @@
           <a:p>
             <a:fld id="{F60FF669-7D96-4648-B4B5-F42C727F33EE}" type="slidenum">
               <a:rPr lang="en-US" smtClean="0"/>
-              <a:t>6</a:t>
+              <a:t>4</a:t>
             </a:fld>
             <a:endParaRPr lang="en-US"/>
           </a:p>
@@ -2376,7 +2103,7 @@
           <a:p>
             <a:fld id="{AE9F067D-61A8-4CC7-8CE1-5E6352DF97F2}" type="datetimeFigureOut">
               <a:rPr lang="en-US" smtClean="0"/>
-              <a:t>3/25/2026</a:t>
+              <a:t>3/26/2026</a:t>
             </a:fld>
             <a:endParaRPr lang="en-US"/>
           </a:p>
@@ -2576,7 +2303,7 @@
           <a:p>
             <a:fld id="{AE9F067D-61A8-4CC7-8CE1-5E6352DF97F2}" type="datetimeFigureOut">
               <a:rPr lang="en-US" smtClean="0"/>
-              <a:t>3/25/2026</a:t>
+              <a:t>3/26/2026</a:t>
             </a:fld>
             <a:endParaRPr lang="en-US"/>
           </a:p>
@@ -2786,7 +2513,7 @@
           <a:p>
             <a:fld id="{AE9F067D-61A8-4CC7-8CE1-5E6352DF97F2}" type="datetimeFigureOut">
               <a:rPr lang="en-US" smtClean="0"/>
-              <a:t>3/25/2026</a:t>
+              <a:t>3/26/2026</a:t>
             </a:fld>
             <a:endParaRPr lang="en-US"/>
           </a:p>
@@ -2986,7 +2713,7 @@
           <a:p>
             <a:fld id="{AE9F067D-61A8-4CC7-8CE1-5E6352DF97F2}" type="datetimeFigureOut">
               <a:rPr lang="en-US" smtClean="0"/>
-              <a:t>3/25/2026</a:t>
+              <a:t>3/26/2026</a:t>
             </a:fld>
             <a:endParaRPr lang="en-US"/>
           </a:p>
@@ -3262,7 +2989,7 @@
           <a:p>
             <a:fld id="{AE9F067D-61A8-4CC7-8CE1-5E6352DF97F2}" type="datetimeFigureOut">
               <a:rPr lang="en-US" smtClean="0"/>
-              <a:t>3/25/2026</a:t>
+              <a:t>3/26/2026</a:t>
             </a:fld>
             <a:endParaRPr lang="en-US"/>
           </a:p>
@@ -3530,7 +3257,7 @@
           <a:p>
             <a:fld id="{AE9F067D-61A8-4CC7-8CE1-5E6352DF97F2}" type="datetimeFigureOut">
               <a:rPr lang="en-US" smtClean="0"/>
-              <a:t>3/25/2026</a:t>
+              <a:t>3/26/2026</a:t>
             </a:fld>
             <a:endParaRPr lang="en-US"/>
           </a:p>
@@ -3945,7 +3672,7 @@
           <a:p>
             <a:fld id="{AE9F067D-61A8-4CC7-8CE1-5E6352DF97F2}" type="datetimeFigureOut">
               <a:rPr lang="en-US" smtClean="0"/>
-              <a:t>3/25/2026</a:t>
+              <a:t>3/26/2026</a:t>
             </a:fld>
             <a:endParaRPr lang="en-US"/>
           </a:p>
@@ -4087,7 +3814,7 @@
           <a:p>
             <a:fld id="{AE9F067D-61A8-4CC7-8CE1-5E6352DF97F2}" type="datetimeFigureOut">
               <a:rPr lang="en-US" smtClean="0"/>
-              <a:t>3/25/2026</a:t>
+              <a:t>3/26/2026</a:t>
             </a:fld>
             <a:endParaRPr lang="en-US"/>
           </a:p>
@@ -4200,7 +3927,7 @@
           <a:p>
             <a:fld id="{AE9F067D-61A8-4CC7-8CE1-5E6352DF97F2}" type="datetimeFigureOut">
               <a:rPr lang="en-US" smtClean="0"/>
-              <a:t>3/25/2026</a:t>
+              <a:t>3/26/2026</a:t>
             </a:fld>
             <a:endParaRPr lang="en-US"/>
           </a:p>
@@ -4513,7 +4240,7 @@
           <a:p>
             <a:fld id="{AE9F067D-61A8-4CC7-8CE1-5E6352DF97F2}" type="datetimeFigureOut">
               <a:rPr lang="en-US" smtClean="0"/>
-              <a:t>3/25/2026</a:t>
+              <a:t>3/26/2026</a:t>
             </a:fld>
             <a:endParaRPr lang="en-US"/>
           </a:p>
@@ -4802,7 +4529,7 @@
           <a:p>
             <a:fld id="{AE9F067D-61A8-4CC7-8CE1-5E6352DF97F2}" type="datetimeFigureOut">
               <a:rPr lang="en-US" smtClean="0"/>
-              <a:t>3/25/2026</a:t>
+              <a:t>3/26/2026</a:t>
             </a:fld>
             <a:endParaRPr lang="en-US"/>
           </a:p>
@@ -5045,7 +4772,7 @@
           <a:p>
             <a:fld id="{AE9F067D-61A8-4CC7-8CE1-5E6352DF97F2}" type="datetimeFigureOut">
               <a:rPr lang="en-US" smtClean="0"/>
-              <a:t>3/25/2026</a:t>
+              <a:t>3/26/2026</a:t>
             </a:fld>
             <a:endParaRPr lang="en-US"/>
           </a:p>
@@ -5541,1815 +5268,6 @@
         <p:cNvPr id="1" name="">
           <a:extLst>
             <a:ext uri="{FF2B5EF4-FFF2-40B4-BE49-F238E27FC236}">
-              <a16:creationId xmlns:a16="http://schemas.microsoft.com/office/drawing/2014/main" id="{3B5DB4EF-6333-E829-9CA0-2FF713CC1A57}"/>
-            </a:ext>
-          </a:extLst>
-        </p:cNvPr>
-        <p:cNvGrpSpPr/>
-        <p:nvPr/>
-      </p:nvGrpSpPr>
-      <p:grpSpPr>
-        <a:xfrm>
-          <a:off x="0" y="0"/>
-          <a:ext cx="0" cy="0"/>
-          <a:chOff x="0" y="0"/>
-          <a:chExt cx="0" cy="0"/>
-        </a:xfrm>
-      </p:grpSpPr>
-      <p:sp>
-        <p:nvSpPr>
-          <p:cNvPr id="2" name="Titre 1">
-            <a:extLst>
-              <a:ext uri="{FF2B5EF4-FFF2-40B4-BE49-F238E27FC236}">
-                <a16:creationId xmlns:a16="http://schemas.microsoft.com/office/drawing/2014/main" id="{F6DDDE03-DBA5-03BB-4006-E2770D457599}"/>
-              </a:ext>
-            </a:extLst>
-          </p:cNvPr>
-          <p:cNvSpPr>
-            <a:spLocks noGrp="1"/>
-          </p:cNvSpPr>
-          <p:nvPr>
-            <p:ph type="title"/>
-          </p:nvPr>
-        </p:nvSpPr>
-        <p:spPr>
-          <a:xfrm>
-            <a:off x="244887" y="197602"/>
-            <a:ext cx="10515600" cy="598136"/>
-          </a:xfrm>
-        </p:spPr>
-        <p:txBody>
-          <a:bodyPr>
-            <a:normAutofit/>
-          </a:bodyPr>
-          <a:lstStyle/>
-          <a:p>
-            <a:r>
-              <a:rPr lang="en-US" sz="3000" dirty="0"/>
-              <a:t>CDI network inference with </a:t>
-            </a:r>
-            <a:r>
-              <a:rPr lang="en-US" sz="3000" dirty="0" err="1"/>
-              <a:t>FlashWeave</a:t>
-            </a:r>
-            <a:r>
-              <a:rPr lang="en-US" sz="3000" dirty="0"/>
-              <a:t> (top taxa)</a:t>
-            </a:r>
-          </a:p>
-        </p:txBody>
-      </p:sp>
-      <p:pic>
-        <p:nvPicPr>
-          <p:cNvPr id="7170" name="Picture 2">
-            <a:extLst>
-              <a:ext uri="{FF2B5EF4-FFF2-40B4-BE49-F238E27FC236}">
-                <a16:creationId xmlns:a16="http://schemas.microsoft.com/office/drawing/2014/main" id="{8F4AB06B-0359-A0A9-A2F0-CF1640305D26}"/>
-              </a:ext>
-            </a:extLst>
-          </p:cNvPr>
-          <p:cNvPicPr>
-            <a:picLocks noChangeAspect="1" noChangeArrowheads="1"/>
-          </p:cNvPicPr>
-          <p:nvPr/>
-        </p:nvPicPr>
-        <p:blipFill>
-          <a:blip r:embed="rId2">
-            <a:extLst>
-              <a:ext uri="{28A0092B-C50C-407E-A947-70E740481C1C}">
-                <a14:useLocalDpi xmlns:a14="http://schemas.microsoft.com/office/drawing/2010/main" val="0"/>
-              </a:ext>
-            </a:extLst>
-          </a:blip>
-          <a:srcRect/>
-          <a:stretch>
-            <a:fillRect/>
-          </a:stretch>
-        </p:blipFill>
-        <p:spPr bwMode="auto">
-          <a:xfrm>
-            <a:off x="244887" y="795738"/>
-            <a:ext cx="4393387" cy="5648641"/>
-          </a:xfrm>
-          <a:prstGeom prst="rect">
-            <a:avLst/>
-          </a:prstGeom>
-          <a:noFill/>
-          <a:extLst>
-            <a:ext uri="{909E8E84-426E-40DD-AFC4-6F175D3DCCD1}">
-              <a14:hiddenFill xmlns:a14="http://schemas.microsoft.com/office/drawing/2010/main">
-                <a:solidFill>
-                  <a:srgbClr val="FFFFFF"/>
-                </a:solidFill>
-              </a14:hiddenFill>
-            </a:ext>
-          </a:extLst>
-        </p:spPr>
-      </p:pic>
-      <p:pic>
-        <p:nvPicPr>
-          <p:cNvPr id="7172" name="Picture 4">
-            <a:extLst>
-              <a:ext uri="{FF2B5EF4-FFF2-40B4-BE49-F238E27FC236}">
-                <a16:creationId xmlns:a16="http://schemas.microsoft.com/office/drawing/2014/main" id="{2DAC08B8-C48A-78B2-49CD-8BF7F329FE36}"/>
-              </a:ext>
-            </a:extLst>
-          </p:cNvPr>
-          <p:cNvPicPr>
-            <a:picLocks noChangeAspect="1" noChangeArrowheads="1"/>
-          </p:cNvPicPr>
-          <p:nvPr/>
-        </p:nvPicPr>
-        <p:blipFill>
-          <a:blip r:embed="rId3">
-            <a:extLst>
-              <a:ext uri="{28A0092B-C50C-407E-A947-70E740481C1C}">
-                <a14:useLocalDpi xmlns:a14="http://schemas.microsoft.com/office/drawing/2010/main" val="0"/>
-              </a:ext>
-            </a:extLst>
-          </a:blip>
-          <a:srcRect/>
-          <a:stretch>
-            <a:fillRect/>
-          </a:stretch>
-        </p:blipFill>
-        <p:spPr bwMode="auto">
-          <a:xfrm>
-            <a:off x="5878808" y="758020"/>
-            <a:ext cx="5961888" cy="4258492"/>
-          </a:xfrm>
-          <a:prstGeom prst="rect">
-            <a:avLst/>
-          </a:prstGeom>
-          <a:noFill/>
-          <a:extLst>
-            <a:ext uri="{909E8E84-426E-40DD-AFC4-6F175D3DCCD1}">
-              <a14:hiddenFill xmlns:a14="http://schemas.microsoft.com/office/drawing/2010/main">
-                <a:solidFill>
-                  <a:srgbClr val="FFFFFF"/>
-                </a:solidFill>
-              </a14:hiddenFill>
-            </a:ext>
-          </a:extLst>
-        </p:spPr>
-      </p:pic>
-      <p:sp>
-        <p:nvSpPr>
-          <p:cNvPr id="3" name="ZoneTexte 2">
-            <a:extLst>
-              <a:ext uri="{FF2B5EF4-FFF2-40B4-BE49-F238E27FC236}">
-                <a16:creationId xmlns:a16="http://schemas.microsoft.com/office/drawing/2014/main" id="{F3EBF5C8-DA34-14D4-8843-6106EB25EC22}"/>
-              </a:ext>
-            </a:extLst>
-          </p:cNvPr>
-          <p:cNvSpPr txBox="1"/>
-          <p:nvPr/>
-        </p:nvSpPr>
-        <p:spPr>
-          <a:xfrm>
-            <a:off x="3982207" y="5515113"/>
-            <a:ext cx="1816250" cy="954107"/>
-          </a:xfrm>
-          <a:prstGeom prst="rect">
-            <a:avLst/>
-          </a:prstGeom>
-          <a:noFill/>
-        </p:spPr>
-        <p:txBody>
-          <a:bodyPr wrap="square" rtlCol="0">
-            <a:spAutoFit/>
-          </a:bodyPr>
-          <a:lstStyle/>
-          <a:p>
-            <a:r>
-              <a:rPr lang="en-US" sz="1400" dirty="0"/>
-              <a:t>Now, evenness is lower for D when taking top taxa; does that make sense?</a:t>
-            </a:r>
-            <a:endParaRPr lang="en-US" sz="1400" dirty="0">
-              <a:highlight>
-                <a:srgbClr val="FFFF00"/>
-              </a:highlight>
-            </a:endParaRPr>
-          </a:p>
-        </p:txBody>
-      </p:sp>
-      <p:sp>
-        <p:nvSpPr>
-          <p:cNvPr id="4" name="ZoneTexte 3">
-            <a:extLst>
-              <a:ext uri="{FF2B5EF4-FFF2-40B4-BE49-F238E27FC236}">
-                <a16:creationId xmlns:a16="http://schemas.microsoft.com/office/drawing/2014/main" id="{6677468C-306F-CB83-927F-FD5C71EEDE10}"/>
-              </a:ext>
-            </a:extLst>
-          </p:cNvPr>
-          <p:cNvSpPr txBox="1"/>
-          <p:nvPr/>
-        </p:nvSpPr>
-        <p:spPr>
-          <a:xfrm>
-            <a:off x="3869371" y="2678372"/>
-            <a:ext cx="1816250" cy="954107"/>
-          </a:xfrm>
-          <a:prstGeom prst="rect">
-            <a:avLst/>
-          </a:prstGeom>
-          <a:noFill/>
-        </p:spPr>
-        <p:txBody>
-          <a:bodyPr wrap="square" rtlCol="0">
-            <a:spAutoFit/>
-          </a:bodyPr>
-          <a:lstStyle/>
-          <a:p>
-            <a:r>
-              <a:rPr lang="en-US" sz="1400" dirty="0"/>
-              <a:t>PEP is higher when considering top taxa, consistent with our hypothesis</a:t>
-            </a:r>
-            <a:endParaRPr lang="en-US" sz="1400" dirty="0">
-              <a:highlight>
-                <a:srgbClr val="FFFF00"/>
-              </a:highlight>
-            </a:endParaRPr>
-          </a:p>
-        </p:txBody>
-      </p:sp>
-      <p:sp>
-        <p:nvSpPr>
-          <p:cNvPr id="5" name="ZoneTexte 4">
-            <a:extLst>
-              <a:ext uri="{FF2B5EF4-FFF2-40B4-BE49-F238E27FC236}">
-                <a16:creationId xmlns:a16="http://schemas.microsoft.com/office/drawing/2014/main" id="{591A8595-FB0C-9A40-5390-71F758180917}"/>
-              </a:ext>
-            </a:extLst>
-          </p:cNvPr>
-          <p:cNvSpPr txBox="1"/>
-          <p:nvPr/>
-        </p:nvSpPr>
-        <p:spPr>
-          <a:xfrm>
-            <a:off x="6529462" y="5016512"/>
-            <a:ext cx="4393387" cy="307777"/>
-          </a:xfrm>
-          <a:prstGeom prst="rect">
-            <a:avLst/>
-          </a:prstGeom>
-          <a:noFill/>
-        </p:spPr>
-        <p:txBody>
-          <a:bodyPr wrap="square" rtlCol="0">
-            <a:spAutoFit/>
-          </a:bodyPr>
-          <a:lstStyle/>
-          <a:p>
-            <a:r>
-              <a:rPr lang="en-US" sz="1400" dirty="0"/>
-              <a:t>Negative and significant correlation between groups</a:t>
-            </a:r>
-            <a:endParaRPr lang="en-US" sz="1400" dirty="0">
-              <a:highlight>
-                <a:srgbClr val="FFFF00"/>
-              </a:highlight>
-            </a:endParaRPr>
-          </a:p>
-        </p:txBody>
-      </p:sp>
-    </p:spTree>
-    <p:extLst>
-      <p:ext uri="{BB962C8B-B14F-4D97-AF65-F5344CB8AC3E}">
-        <p14:creationId xmlns:p14="http://schemas.microsoft.com/office/powerpoint/2010/main" val="1799677316"/>
-      </p:ext>
-    </p:extLst>
-  </p:cSld>
-  <p:clrMapOvr>
-    <a:masterClrMapping/>
-  </p:clrMapOvr>
-</p:sld>
-</file>
-
-<file path=ppt/slides/slide11.xml><?xml version="1.0" encoding="utf-8"?>
-<p:sld xmlns:a="http://schemas.openxmlformats.org/drawingml/2006/main" xmlns:r="http://schemas.openxmlformats.org/officeDocument/2006/relationships" xmlns:p="http://schemas.openxmlformats.org/presentationml/2006/main">
-  <p:cSld>
-    <p:spTree>
-      <p:nvGrpSpPr>
-        <p:cNvPr id="1" name="">
-          <a:extLst>
-            <a:ext uri="{FF2B5EF4-FFF2-40B4-BE49-F238E27FC236}">
-              <a16:creationId xmlns:a16="http://schemas.microsoft.com/office/drawing/2014/main" id="{018B9280-0449-C322-5994-5FC27AA8BEE3}"/>
-            </a:ext>
-          </a:extLst>
-        </p:cNvPr>
-        <p:cNvGrpSpPr/>
-        <p:nvPr/>
-      </p:nvGrpSpPr>
-      <p:grpSpPr>
-        <a:xfrm>
-          <a:off x="0" y="0"/>
-          <a:ext cx="0" cy="0"/>
-          <a:chOff x="0" y="0"/>
-          <a:chExt cx="0" cy="0"/>
-        </a:xfrm>
-      </p:grpSpPr>
-      <p:pic>
-        <p:nvPicPr>
-          <p:cNvPr id="3074" name="Picture 2">
-            <a:extLst>
-              <a:ext uri="{FF2B5EF4-FFF2-40B4-BE49-F238E27FC236}">
-                <a16:creationId xmlns:a16="http://schemas.microsoft.com/office/drawing/2014/main" id="{04E87E40-8988-7E36-8310-CD0F9A991CDF}"/>
-              </a:ext>
-            </a:extLst>
-          </p:cNvPr>
-          <p:cNvPicPr>
-            <a:picLocks noChangeAspect="1" noChangeArrowheads="1"/>
-          </p:cNvPicPr>
-          <p:nvPr/>
-        </p:nvPicPr>
-        <p:blipFill>
-          <a:blip r:embed="rId2">
-            <a:extLst>
-              <a:ext uri="{28A0092B-C50C-407E-A947-70E740481C1C}">
-                <a14:useLocalDpi xmlns:a14="http://schemas.microsoft.com/office/drawing/2010/main" val="0"/>
-              </a:ext>
-            </a:extLst>
-          </a:blip>
-          <a:srcRect/>
-          <a:stretch>
-            <a:fillRect/>
-          </a:stretch>
-        </p:blipFill>
-        <p:spPr bwMode="auto">
-          <a:xfrm>
-            <a:off x="244887" y="880174"/>
-            <a:ext cx="4220577" cy="5426457"/>
-          </a:xfrm>
-          <a:prstGeom prst="rect">
-            <a:avLst/>
-          </a:prstGeom>
-          <a:noFill/>
-          <a:extLst>
-            <a:ext uri="{909E8E84-426E-40DD-AFC4-6F175D3DCCD1}">
-              <a14:hiddenFill xmlns:a14="http://schemas.microsoft.com/office/drawing/2010/main">
-                <a:solidFill>
-                  <a:srgbClr val="FFFFFF"/>
-                </a:solidFill>
-              </a14:hiddenFill>
-            </a:ext>
-          </a:extLst>
-        </p:spPr>
-      </p:pic>
-      <p:sp>
-        <p:nvSpPr>
-          <p:cNvPr id="2" name="Titre 1">
-            <a:extLst>
-              <a:ext uri="{FF2B5EF4-FFF2-40B4-BE49-F238E27FC236}">
-                <a16:creationId xmlns:a16="http://schemas.microsoft.com/office/drawing/2014/main" id="{2684C5A3-7D0F-B05E-70BA-A2903296BF2D}"/>
-              </a:ext>
-            </a:extLst>
-          </p:cNvPr>
-          <p:cNvSpPr>
-            <a:spLocks noGrp="1"/>
-          </p:cNvSpPr>
-          <p:nvPr>
-            <p:ph type="title"/>
-          </p:nvPr>
-        </p:nvSpPr>
-        <p:spPr>
-          <a:xfrm>
-            <a:off x="244887" y="197602"/>
-            <a:ext cx="10515600" cy="598136"/>
-          </a:xfrm>
-        </p:spPr>
-        <p:txBody>
-          <a:bodyPr>
-            <a:normAutofit/>
-          </a:bodyPr>
-          <a:lstStyle/>
-          <a:p>
-            <a:r>
-              <a:rPr lang="en-US" sz="3000" dirty="0"/>
-              <a:t>CDI network inference with </a:t>
-            </a:r>
-            <a:r>
-              <a:rPr lang="en-US" sz="3000" dirty="0" err="1"/>
-              <a:t>FlashWeave</a:t>
-            </a:r>
-            <a:r>
-              <a:rPr lang="en-US" sz="3000" dirty="0"/>
-              <a:t> – prevalence inside loop </a:t>
-            </a:r>
-          </a:p>
-        </p:txBody>
-      </p:sp>
-      <p:sp>
-        <p:nvSpPr>
-          <p:cNvPr id="3" name="ZoneTexte 2">
-            <a:extLst>
-              <a:ext uri="{FF2B5EF4-FFF2-40B4-BE49-F238E27FC236}">
-                <a16:creationId xmlns:a16="http://schemas.microsoft.com/office/drawing/2014/main" id="{EAD0EE78-2F54-0553-B251-F4AD2AB6A5C7}"/>
-              </a:ext>
-            </a:extLst>
-          </p:cNvPr>
-          <p:cNvSpPr txBox="1"/>
-          <p:nvPr/>
-        </p:nvSpPr>
-        <p:spPr>
-          <a:xfrm>
-            <a:off x="3762838" y="2690336"/>
-            <a:ext cx="1663148" cy="523220"/>
-          </a:xfrm>
-          <a:prstGeom prst="rect">
-            <a:avLst/>
-          </a:prstGeom>
-          <a:noFill/>
-        </p:spPr>
-        <p:txBody>
-          <a:bodyPr wrap="square" rtlCol="0">
-            <a:spAutoFit/>
-          </a:bodyPr>
-          <a:lstStyle/>
-          <a:p>
-            <a:r>
-              <a:rPr lang="en-US" sz="1400" dirty="0"/>
-              <a:t>PEP is still higher for D group.</a:t>
-            </a:r>
-          </a:p>
-        </p:txBody>
-      </p:sp>
-      <p:pic>
-        <p:nvPicPr>
-          <p:cNvPr id="3076" name="Picture 4">
-            <a:extLst>
-              <a:ext uri="{FF2B5EF4-FFF2-40B4-BE49-F238E27FC236}">
-                <a16:creationId xmlns:a16="http://schemas.microsoft.com/office/drawing/2014/main" id="{5AD719FF-D9E4-172E-6017-6C5022ECF6AB}"/>
-              </a:ext>
-            </a:extLst>
-          </p:cNvPr>
-          <p:cNvPicPr>
-            <a:picLocks noChangeAspect="1" noChangeArrowheads="1"/>
-          </p:cNvPicPr>
-          <p:nvPr/>
-        </p:nvPicPr>
-        <p:blipFill>
-          <a:blip r:embed="rId3">
-            <a:extLst>
-              <a:ext uri="{28A0092B-C50C-407E-A947-70E740481C1C}">
-                <a14:useLocalDpi xmlns:a14="http://schemas.microsoft.com/office/drawing/2010/main" val="0"/>
-              </a:ext>
-            </a:extLst>
-          </a:blip>
-          <a:srcRect/>
-          <a:stretch>
-            <a:fillRect/>
-          </a:stretch>
-        </p:blipFill>
-        <p:spPr bwMode="auto">
-          <a:xfrm>
-            <a:off x="5793437" y="795738"/>
-            <a:ext cx="5825248" cy="4160891"/>
-          </a:xfrm>
-          <a:prstGeom prst="rect">
-            <a:avLst/>
-          </a:prstGeom>
-          <a:noFill/>
-          <a:extLst>
-            <a:ext uri="{909E8E84-426E-40DD-AFC4-6F175D3DCCD1}">
-              <a14:hiddenFill xmlns:a14="http://schemas.microsoft.com/office/drawing/2010/main">
-                <a:solidFill>
-                  <a:srgbClr val="FFFFFF"/>
-                </a:solidFill>
-              </a14:hiddenFill>
-            </a:ext>
-          </a:extLst>
-        </p:spPr>
-      </p:pic>
-      <p:sp>
-        <p:nvSpPr>
-          <p:cNvPr id="4" name="ZoneTexte 3">
-            <a:extLst>
-              <a:ext uri="{FF2B5EF4-FFF2-40B4-BE49-F238E27FC236}">
-                <a16:creationId xmlns:a16="http://schemas.microsoft.com/office/drawing/2014/main" id="{702E47EC-A6B5-8F76-C57C-4DCA9126CD34}"/>
-              </a:ext>
-            </a:extLst>
-          </p:cNvPr>
-          <p:cNvSpPr txBox="1"/>
-          <p:nvPr/>
-        </p:nvSpPr>
-        <p:spPr>
-          <a:xfrm>
-            <a:off x="3839539" y="5310164"/>
-            <a:ext cx="1663148" cy="954107"/>
-          </a:xfrm>
-          <a:prstGeom prst="rect">
-            <a:avLst/>
-          </a:prstGeom>
-          <a:noFill/>
-        </p:spPr>
-        <p:txBody>
-          <a:bodyPr wrap="square" rtlCol="0">
-            <a:spAutoFit/>
-          </a:bodyPr>
-          <a:lstStyle/>
-          <a:p>
-            <a:r>
-              <a:rPr lang="en-US" sz="1400" dirty="0"/>
-              <a:t>Sheldon evenness still consistent with the previous analysis</a:t>
-            </a:r>
-          </a:p>
-        </p:txBody>
-      </p:sp>
-      <p:sp>
-        <p:nvSpPr>
-          <p:cNvPr id="5" name="ZoneTexte 4">
-            <a:extLst>
-              <a:ext uri="{FF2B5EF4-FFF2-40B4-BE49-F238E27FC236}">
-                <a16:creationId xmlns:a16="http://schemas.microsoft.com/office/drawing/2014/main" id="{D9FA8990-E031-0F40-D079-8261D4971718}"/>
-              </a:ext>
-            </a:extLst>
-          </p:cNvPr>
-          <p:cNvSpPr txBox="1"/>
-          <p:nvPr/>
-        </p:nvSpPr>
-        <p:spPr>
-          <a:xfrm>
-            <a:off x="6296944" y="4898571"/>
-            <a:ext cx="5256428" cy="307777"/>
-          </a:xfrm>
-          <a:prstGeom prst="rect">
-            <a:avLst/>
-          </a:prstGeom>
-          <a:noFill/>
-        </p:spPr>
-        <p:txBody>
-          <a:bodyPr wrap="square" rtlCol="0">
-            <a:spAutoFit/>
-          </a:bodyPr>
-          <a:lstStyle/>
-          <a:p>
-            <a:r>
-              <a:rPr lang="en-US" sz="1400" dirty="0"/>
-              <a:t>We also have a significant positive correlation between groups</a:t>
-            </a:r>
-          </a:p>
-        </p:txBody>
-      </p:sp>
-    </p:spTree>
-    <p:extLst>
-      <p:ext uri="{BB962C8B-B14F-4D97-AF65-F5344CB8AC3E}">
-        <p14:creationId xmlns:p14="http://schemas.microsoft.com/office/powerpoint/2010/main" val="3413155239"/>
-      </p:ext>
-    </p:extLst>
-  </p:cSld>
-  <p:clrMapOvr>
-    <a:masterClrMapping/>
-  </p:clrMapOvr>
-</p:sld>
-</file>
-
-<file path=ppt/slides/slide12.xml><?xml version="1.0" encoding="utf-8"?>
-<p:sld xmlns:a="http://schemas.openxmlformats.org/drawingml/2006/main" xmlns:r="http://schemas.openxmlformats.org/officeDocument/2006/relationships" xmlns:p="http://schemas.openxmlformats.org/presentationml/2006/main">
-  <p:cSld>
-    <p:spTree>
-      <p:nvGrpSpPr>
-        <p:cNvPr id="1" name="">
-          <a:extLst>
-            <a:ext uri="{FF2B5EF4-FFF2-40B4-BE49-F238E27FC236}">
-              <a16:creationId xmlns:a16="http://schemas.microsoft.com/office/drawing/2014/main" id="{C8154EB7-1536-DEAE-C2B5-EC49D63CACD9}"/>
-            </a:ext>
-          </a:extLst>
-        </p:cNvPr>
-        <p:cNvGrpSpPr/>
-        <p:nvPr/>
-      </p:nvGrpSpPr>
-      <p:grpSpPr>
-        <a:xfrm>
-          <a:off x="0" y="0"/>
-          <a:ext cx="0" cy="0"/>
-          <a:chOff x="0" y="0"/>
-          <a:chExt cx="0" cy="0"/>
-        </a:xfrm>
-      </p:grpSpPr>
-      <p:sp>
-        <p:nvSpPr>
-          <p:cNvPr id="2" name="Titre 1">
-            <a:extLst>
-              <a:ext uri="{FF2B5EF4-FFF2-40B4-BE49-F238E27FC236}">
-                <a16:creationId xmlns:a16="http://schemas.microsoft.com/office/drawing/2014/main" id="{75086FF7-CBC7-2267-2361-8D3073A973BB}"/>
-              </a:ext>
-            </a:extLst>
-          </p:cNvPr>
-          <p:cNvSpPr>
-            <a:spLocks noGrp="1"/>
-          </p:cNvSpPr>
-          <p:nvPr>
-            <p:ph type="title"/>
-          </p:nvPr>
-        </p:nvSpPr>
-        <p:spPr>
-          <a:xfrm>
-            <a:off x="244887" y="197602"/>
-            <a:ext cx="10515600" cy="598136"/>
-          </a:xfrm>
-        </p:spPr>
-        <p:txBody>
-          <a:bodyPr>
-            <a:normAutofit fontScale="90000"/>
-          </a:bodyPr>
-          <a:lstStyle/>
-          <a:p>
-            <a:r>
-              <a:rPr lang="en-US" sz="3000" dirty="0"/>
-              <a:t>CDI network inference with </a:t>
-            </a:r>
-            <a:r>
-              <a:rPr lang="en-US" sz="3000" dirty="0" err="1"/>
-              <a:t>FlashWeave</a:t>
-            </a:r>
-            <a:r>
-              <a:rPr lang="en-US" sz="3000" dirty="0"/>
-              <a:t> (top taxa) – prevalence inside loop</a:t>
-            </a:r>
-          </a:p>
-        </p:txBody>
-      </p:sp>
-      <p:pic>
-        <p:nvPicPr>
-          <p:cNvPr id="4098" name="Picture 2">
-            <a:extLst>
-              <a:ext uri="{FF2B5EF4-FFF2-40B4-BE49-F238E27FC236}">
-                <a16:creationId xmlns:a16="http://schemas.microsoft.com/office/drawing/2014/main" id="{CF4DD222-BE7F-3847-43AD-DDDCF95BE276}"/>
-              </a:ext>
-            </a:extLst>
-          </p:cNvPr>
-          <p:cNvPicPr>
-            <a:picLocks noChangeAspect="1" noChangeArrowheads="1"/>
-          </p:cNvPicPr>
-          <p:nvPr/>
-        </p:nvPicPr>
-        <p:blipFill>
-          <a:blip r:embed="rId2">
-            <a:extLst>
-              <a:ext uri="{28A0092B-C50C-407E-A947-70E740481C1C}">
-                <a14:useLocalDpi xmlns:a14="http://schemas.microsoft.com/office/drawing/2010/main" val="0"/>
-              </a:ext>
-            </a:extLst>
-          </a:blip>
-          <a:srcRect/>
-          <a:stretch>
-            <a:fillRect/>
-          </a:stretch>
-        </p:blipFill>
-        <p:spPr bwMode="auto">
-          <a:xfrm>
-            <a:off x="97131" y="940881"/>
-            <a:ext cx="4303048" cy="5532491"/>
-          </a:xfrm>
-          <a:prstGeom prst="rect">
-            <a:avLst/>
-          </a:prstGeom>
-          <a:noFill/>
-          <a:extLst>
-            <a:ext uri="{909E8E84-426E-40DD-AFC4-6F175D3DCCD1}">
-              <a14:hiddenFill xmlns:a14="http://schemas.microsoft.com/office/drawing/2010/main">
-                <a:solidFill>
-                  <a:srgbClr val="FFFFFF"/>
-                </a:solidFill>
-              </a14:hiddenFill>
-            </a:ext>
-          </a:extLst>
-        </p:spPr>
-      </p:pic>
-      <p:pic>
-        <p:nvPicPr>
-          <p:cNvPr id="4100" name="Picture 4">
-            <a:extLst>
-              <a:ext uri="{FF2B5EF4-FFF2-40B4-BE49-F238E27FC236}">
-                <a16:creationId xmlns:a16="http://schemas.microsoft.com/office/drawing/2014/main" id="{72B79B0F-C86C-2578-B22A-F20F6FD00A3F}"/>
-              </a:ext>
-            </a:extLst>
-          </p:cNvPr>
-          <p:cNvPicPr>
-            <a:picLocks noChangeAspect="1" noChangeArrowheads="1"/>
-          </p:cNvPicPr>
-          <p:nvPr/>
-        </p:nvPicPr>
-        <p:blipFill>
-          <a:blip r:embed="rId3">
-            <a:extLst>
-              <a:ext uri="{28A0092B-C50C-407E-A947-70E740481C1C}">
-                <a14:useLocalDpi xmlns:a14="http://schemas.microsoft.com/office/drawing/2010/main" val="0"/>
-              </a:ext>
-            </a:extLst>
-          </a:blip>
-          <a:srcRect/>
-          <a:stretch>
-            <a:fillRect/>
-          </a:stretch>
-        </p:blipFill>
-        <p:spPr bwMode="auto">
-          <a:xfrm>
-            <a:off x="5827486" y="718720"/>
-            <a:ext cx="6119627" cy="4371162"/>
-          </a:xfrm>
-          <a:prstGeom prst="rect">
-            <a:avLst/>
-          </a:prstGeom>
-          <a:noFill/>
-          <a:extLst>
-            <a:ext uri="{909E8E84-426E-40DD-AFC4-6F175D3DCCD1}">
-              <a14:hiddenFill xmlns:a14="http://schemas.microsoft.com/office/drawing/2010/main">
-                <a:solidFill>
-                  <a:srgbClr val="FFFFFF"/>
-                </a:solidFill>
-              </a14:hiddenFill>
-            </a:ext>
-          </a:extLst>
-        </p:spPr>
-      </p:pic>
-      <p:sp>
-        <p:nvSpPr>
-          <p:cNvPr id="3" name="ZoneTexte 2">
-            <a:extLst>
-              <a:ext uri="{FF2B5EF4-FFF2-40B4-BE49-F238E27FC236}">
-                <a16:creationId xmlns:a16="http://schemas.microsoft.com/office/drawing/2014/main" id="{5798479D-B920-B59A-613C-AD83233C00DC}"/>
-              </a:ext>
-            </a:extLst>
-          </p:cNvPr>
-          <p:cNvSpPr txBox="1"/>
-          <p:nvPr/>
-        </p:nvSpPr>
-        <p:spPr>
-          <a:xfrm>
-            <a:off x="3762838" y="2690336"/>
-            <a:ext cx="1663148" cy="523220"/>
-          </a:xfrm>
-          <a:prstGeom prst="rect">
-            <a:avLst/>
-          </a:prstGeom>
-          <a:noFill/>
-        </p:spPr>
-        <p:txBody>
-          <a:bodyPr wrap="square" rtlCol="0">
-            <a:spAutoFit/>
-          </a:bodyPr>
-          <a:lstStyle/>
-          <a:p>
-            <a:r>
-              <a:rPr lang="en-US" sz="1400" dirty="0"/>
-              <a:t>PEP is still higher for D group.</a:t>
-            </a:r>
-          </a:p>
-        </p:txBody>
-      </p:sp>
-      <p:sp>
-        <p:nvSpPr>
-          <p:cNvPr id="4" name="ZoneTexte 3">
-            <a:extLst>
-              <a:ext uri="{FF2B5EF4-FFF2-40B4-BE49-F238E27FC236}">
-                <a16:creationId xmlns:a16="http://schemas.microsoft.com/office/drawing/2014/main" id="{C5482D35-EE77-F45A-91A8-182985F49687}"/>
-              </a:ext>
-            </a:extLst>
-          </p:cNvPr>
-          <p:cNvSpPr txBox="1"/>
-          <p:nvPr/>
-        </p:nvSpPr>
-        <p:spPr>
-          <a:xfrm>
-            <a:off x="3701653" y="5440065"/>
-            <a:ext cx="1663148" cy="954107"/>
-          </a:xfrm>
-          <a:prstGeom prst="rect">
-            <a:avLst/>
-          </a:prstGeom>
-          <a:noFill/>
-        </p:spPr>
-        <p:txBody>
-          <a:bodyPr wrap="square" rtlCol="0">
-            <a:spAutoFit/>
-          </a:bodyPr>
-          <a:lstStyle/>
-          <a:p>
-            <a:r>
-              <a:rPr lang="en-US" sz="1400" dirty="0"/>
-              <a:t>Sheldon evenness still consistent with the previous analysis</a:t>
-            </a:r>
-          </a:p>
-        </p:txBody>
-      </p:sp>
-      <p:sp>
-        <p:nvSpPr>
-          <p:cNvPr id="5" name="ZoneTexte 4">
-            <a:extLst>
-              <a:ext uri="{FF2B5EF4-FFF2-40B4-BE49-F238E27FC236}">
-                <a16:creationId xmlns:a16="http://schemas.microsoft.com/office/drawing/2014/main" id="{2BFCB613-32F5-8AEF-15DE-E6EFA5E15445}"/>
-              </a:ext>
-            </a:extLst>
-          </p:cNvPr>
-          <p:cNvSpPr txBox="1"/>
-          <p:nvPr/>
-        </p:nvSpPr>
-        <p:spPr>
-          <a:xfrm>
-            <a:off x="6500433" y="5000264"/>
-            <a:ext cx="4393387" cy="307777"/>
-          </a:xfrm>
-          <a:prstGeom prst="rect">
-            <a:avLst/>
-          </a:prstGeom>
-          <a:noFill/>
-        </p:spPr>
-        <p:txBody>
-          <a:bodyPr wrap="square" rtlCol="0">
-            <a:spAutoFit/>
-          </a:bodyPr>
-          <a:lstStyle/>
-          <a:p>
-            <a:r>
-              <a:rPr lang="en-US" sz="1400" dirty="0"/>
-              <a:t>Negative and significant correlation between groups</a:t>
-            </a:r>
-            <a:endParaRPr lang="en-US" sz="1400" dirty="0">
-              <a:highlight>
-                <a:srgbClr val="FFFF00"/>
-              </a:highlight>
-            </a:endParaRPr>
-          </a:p>
-        </p:txBody>
-      </p:sp>
-    </p:spTree>
-    <p:extLst>
-      <p:ext uri="{BB962C8B-B14F-4D97-AF65-F5344CB8AC3E}">
-        <p14:creationId xmlns:p14="http://schemas.microsoft.com/office/powerpoint/2010/main" val="2748580013"/>
-      </p:ext>
-    </p:extLst>
-  </p:cSld>
-  <p:clrMapOvr>
-    <a:masterClrMapping/>
-  </p:clrMapOvr>
-</p:sld>
-</file>
-
-<file path=ppt/slides/slide13.xml><?xml version="1.0" encoding="utf-8"?>
-<p:sld xmlns:a="http://schemas.openxmlformats.org/drawingml/2006/main" xmlns:r="http://schemas.openxmlformats.org/officeDocument/2006/relationships" xmlns:p="http://schemas.openxmlformats.org/presentationml/2006/main">
-  <p:cSld>
-    <p:spTree>
-      <p:nvGrpSpPr>
-        <p:cNvPr id="1" name="">
-          <a:extLst>
-            <a:ext uri="{FF2B5EF4-FFF2-40B4-BE49-F238E27FC236}">
-              <a16:creationId xmlns:a16="http://schemas.microsoft.com/office/drawing/2014/main" id="{9B9F4AB1-ED0F-5A17-FF10-FB85322418A3}"/>
-            </a:ext>
-          </a:extLst>
-        </p:cNvPr>
-        <p:cNvGrpSpPr/>
-        <p:nvPr/>
-      </p:nvGrpSpPr>
-      <p:grpSpPr>
-        <a:xfrm>
-          <a:off x="0" y="0"/>
-          <a:ext cx="0" cy="0"/>
-          <a:chOff x="0" y="0"/>
-          <a:chExt cx="0" cy="0"/>
-        </a:xfrm>
-      </p:grpSpPr>
-      <p:sp>
-        <p:nvSpPr>
-          <p:cNvPr id="2" name="Titre 1">
-            <a:extLst>
-              <a:ext uri="{FF2B5EF4-FFF2-40B4-BE49-F238E27FC236}">
-                <a16:creationId xmlns:a16="http://schemas.microsoft.com/office/drawing/2014/main" id="{95B2D6AB-5609-6C5D-522D-193AEE6234F1}"/>
-              </a:ext>
-            </a:extLst>
-          </p:cNvPr>
-          <p:cNvSpPr>
-            <a:spLocks noGrp="1"/>
-          </p:cNvSpPr>
-          <p:nvPr>
-            <p:ph type="title"/>
-          </p:nvPr>
-        </p:nvSpPr>
-        <p:spPr>
-          <a:xfrm>
-            <a:off x="244887" y="197602"/>
-            <a:ext cx="10515600" cy="598136"/>
-          </a:xfrm>
-        </p:spPr>
-        <p:txBody>
-          <a:bodyPr>
-            <a:normAutofit/>
-          </a:bodyPr>
-          <a:lstStyle/>
-          <a:p>
-            <a:r>
-              <a:rPr lang="en-US" sz="3000" dirty="0"/>
-              <a:t>CRC network inference with </a:t>
-            </a:r>
-            <a:r>
-              <a:rPr lang="en-US" sz="3000" dirty="0" err="1"/>
-              <a:t>FlashWeave</a:t>
-            </a:r>
-            <a:endParaRPr lang="en-US" sz="3000" dirty="0"/>
-          </a:p>
-        </p:txBody>
-      </p:sp>
-      <p:sp>
-        <p:nvSpPr>
-          <p:cNvPr id="3" name="ZoneTexte 2">
-            <a:extLst>
-              <a:ext uri="{FF2B5EF4-FFF2-40B4-BE49-F238E27FC236}">
-                <a16:creationId xmlns:a16="http://schemas.microsoft.com/office/drawing/2014/main" id="{AC32ABF9-51F2-A954-BA0E-D802ADF51CDF}"/>
-              </a:ext>
-            </a:extLst>
-          </p:cNvPr>
-          <p:cNvSpPr txBox="1"/>
-          <p:nvPr/>
-        </p:nvSpPr>
-        <p:spPr>
-          <a:xfrm>
-            <a:off x="355988" y="1033063"/>
-            <a:ext cx="6952232" cy="2031325"/>
-          </a:xfrm>
-          <a:prstGeom prst="rect">
-            <a:avLst/>
-          </a:prstGeom>
-          <a:noFill/>
-        </p:spPr>
-        <p:txBody>
-          <a:bodyPr wrap="square" rtlCol="0">
-            <a:spAutoFit/>
-          </a:bodyPr>
-          <a:lstStyle/>
-          <a:p>
-            <a:pPr marL="285750" indent="-285750">
-              <a:buFontTx/>
-              <a:buChar char="-"/>
-            </a:pPr>
-            <a:r>
-              <a:rPr lang="en-US" dirty="0"/>
-              <a:t>Number of samples and taxa:</a:t>
-            </a:r>
-          </a:p>
-          <a:p>
-            <a:pPr marL="742950" lvl="1" indent="-285750">
-              <a:buFontTx/>
-              <a:buChar char="-"/>
-            </a:pPr>
-            <a:r>
-              <a:rPr lang="en-US" dirty="0"/>
-              <a:t>For control samples: 837 taxa and 251 samples</a:t>
-            </a:r>
-          </a:p>
-          <a:p>
-            <a:pPr marL="742950" lvl="1" indent="-285750">
-              <a:buFontTx/>
-              <a:buChar char="-"/>
-            </a:pPr>
-            <a:r>
-              <a:rPr lang="en-US" dirty="0"/>
-              <a:t>For diseased samples: 837 taxa and 324 samples</a:t>
-            </a:r>
-          </a:p>
-          <a:p>
-            <a:pPr marL="285750" indent="-285750">
-              <a:buFontTx/>
-              <a:buChar char="-"/>
-            </a:pPr>
-            <a:r>
-              <a:rPr lang="en-US" dirty="0"/>
-              <a:t>Prevalence filtering (5%): </a:t>
-            </a:r>
-          </a:p>
-          <a:p>
-            <a:pPr marL="285750" indent="-285750">
-              <a:buFontTx/>
-              <a:buChar char="-"/>
-            </a:pPr>
-            <a:r>
-              <a:rPr lang="en-US" dirty="0"/>
-              <a:t>Number of bootstrap iterations: 100</a:t>
-            </a:r>
-          </a:p>
-          <a:p>
-            <a:pPr marL="285750" indent="-285750">
-              <a:buFontTx/>
-              <a:buChar char="-"/>
-            </a:pPr>
-            <a:r>
-              <a:rPr lang="en-US" dirty="0"/>
-              <a:t>Subsampling percentages: 60% - 70% - 80%</a:t>
-            </a:r>
-          </a:p>
-          <a:p>
-            <a:pPr marL="285750" indent="-285750">
-              <a:buFontTx/>
-              <a:buChar char="-"/>
-            </a:pPr>
-            <a:endParaRPr lang="en-US" dirty="0"/>
-          </a:p>
-        </p:txBody>
-      </p:sp>
-      <p:sp>
-        <p:nvSpPr>
-          <p:cNvPr id="4" name="ZoneTexte 3">
-            <a:extLst>
-              <a:ext uri="{FF2B5EF4-FFF2-40B4-BE49-F238E27FC236}">
-                <a16:creationId xmlns:a16="http://schemas.microsoft.com/office/drawing/2014/main" id="{B9A25C61-5A35-2FA5-0AC5-16536A74C0F9}"/>
-              </a:ext>
-            </a:extLst>
-          </p:cNvPr>
-          <p:cNvSpPr txBox="1"/>
-          <p:nvPr/>
-        </p:nvSpPr>
-        <p:spPr>
-          <a:xfrm>
-            <a:off x="244887" y="729735"/>
-            <a:ext cx="3821880" cy="369332"/>
-          </a:xfrm>
-          <a:prstGeom prst="rect">
-            <a:avLst/>
-          </a:prstGeom>
-          <a:noFill/>
-        </p:spPr>
-        <p:txBody>
-          <a:bodyPr wrap="none" rtlCol="0">
-            <a:spAutoFit/>
-          </a:bodyPr>
-          <a:lstStyle/>
-          <a:p>
-            <a:r>
-              <a:rPr lang="en-US" b="1" dirty="0"/>
-              <a:t>Network construction with all taxa </a:t>
-            </a:r>
-          </a:p>
-        </p:txBody>
-      </p:sp>
-      <p:sp>
-        <p:nvSpPr>
-          <p:cNvPr id="5" name="ZoneTexte 4">
-            <a:extLst>
-              <a:ext uri="{FF2B5EF4-FFF2-40B4-BE49-F238E27FC236}">
-                <a16:creationId xmlns:a16="http://schemas.microsoft.com/office/drawing/2014/main" id="{BC8448B7-1823-23ED-79C8-20B2F3160092}"/>
-              </a:ext>
-            </a:extLst>
-          </p:cNvPr>
-          <p:cNvSpPr txBox="1"/>
-          <p:nvPr/>
-        </p:nvSpPr>
-        <p:spPr>
-          <a:xfrm>
-            <a:off x="303409" y="3003543"/>
-            <a:ext cx="3859198" cy="369332"/>
-          </a:xfrm>
-          <a:prstGeom prst="rect">
-            <a:avLst/>
-          </a:prstGeom>
-          <a:noFill/>
-        </p:spPr>
-        <p:txBody>
-          <a:bodyPr wrap="none" rtlCol="0">
-            <a:spAutoFit/>
-          </a:bodyPr>
-          <a:lstStyle/>
-          <a:p>
-            <a:r>
-              <a:rPr lang="en-US" b="1" dirty="0"/>
-              <a:t>Network construction with top taxa</a:t>
-            </a:r>
-          </a:p>
-        </p:txBody>
-      </p:sp>
-      <p:sp>
-        <p:nvSpPr>
-          <p:cNvPr id="6" name="ZoneTexte 5">
-            <a:extLst>
-              <a:ext uri="{FF2B5EF4-FFF2-40B4-BE49-F238E27FC236}">
-                <a16:creationId xmlns:a16="http://schemas.microsoft.com/office/drawing/2014/main" id="{7518BFAC-B611-2133-392F-4D6DA99F506A}"/>
-              </a:ext>
-            </a:extLst>
-          </p:cNvPr>
-          <p:cNvSpPr txBox="1"/>
-          <p:nvPr/>
-        </p:nvSpPr>
-        <p:spPr>
-          <a:xfrm>
-            <a:off x="4626846" y="3506731"/>
-            <a:ext cx="6952232" cy="1200329"/>
-          </a:xfrm>
-          <a:prstGeom prst="rect">
-            <a:avLst/>
-          </a:prstGeom>
-          <a:noFill/>
-        </p:spPr>
-        <p:txBody>
-          <a:bodyPr wrap="square" rtlCol="0">
-            <a:spAutoFit/>
-          </a:bodyPr>
-          <a:lstStyle/>
-          <a:p>
-            <a:pPr marL="285750" indent="-285750">
-              <a:buFontTx/>
-              <a:buChar char="-"/>
-            </a:pPr>
-            <a:r>
-              <a:rPr lang="en-US" dirty="0"/>
-              <a:t>Abundance filtering (top 1%): </a:t>
-            </a:r>
-          </a:p>
-          <a:p>
-            <a:pPr marL="285750" indent="-285750">
-              <a:buFontTx/>
-              <a:buChar char="-"/>
-            </a:pPr>
-            <a:r>
-              <a:rPr lang="en-US" dirty="0"/>
-              <a:t>Number of bootstrap iterations: 100</a:t>
-            </a:r>
-          </a:p>
-          <a:p>
-            <a:pPr marL="285750" indent="-285750">
-              <a:buFontTx/>
-              <a:buChar char="-"/>
-            </a:pPr>
-            <a:r>
-              <a:rPr lang="en-US" dirty="0"/>
-              <a:t>Subsampling percentages: 60% - 70% - 80%</a:t>
-            </a:r>
-          </a:p>
-          <a:p>
-            <a:pPr marL="285750" indent="-285750">
-              <a:buFontTx/>
-              <a:buChar char="-"/>
-            </a:pPr>
-            <a:endParaRPr lang="en-US" dirty="0"/>
-          </a:p>
-        </p:txBody>
-      </p:sp>
-      <p:pic>
-        <p:nvPicPr>
-          <p:cNvPr id="8194" name="Picture 2">
-            <a:extLst>
-              <a:ext uri="{FF2B5EF4-FFF2-40B4-BE49-F238E27FC236}">
-                <a16:creationId xmlns:a16="http://schemas.microsoft.com/office/drawing/2014/main" id="{2FC6A44B-F750-62F1-3BA8-D66AD12423D7}"/>
-              </a:ext>
-            </a:extLst>
-          </p:cNvPr>
-          <p:cNvPicPr>
-            <a:picLocks noChangeAspect="1" noChangeArrowheads="1"/>
-          </p:cNvPicPr>
-          <p:nvPr/>
-        </p:nvPicPr>
-        <p:blipFill>
-          <a:blip r:embed="rId2">
-            <a:extLst>
-              <a:ext uri="{28A0092B-C50C-407E-A947-70E740481C1C}">
-                <a14:useLocalDpi xmlns:a14="http://schemas.microsoft.com/office/drawing/2010/main" val="0"/>
-              </a:ext>
-            </a:extLst>
-          </a:blip>
-          <a:srcRect/>
-          <a:stretch>
-            <a:fillRect/>
-          </a:stretch>
-        </p:blipFill>
-        <p:spPr bwMode="auto">
-          <a:xfrm>
-            <a:off x="409334" y="3506731"/>
-            <a:ext cx="4159192" cy="2970851"/>
-          </a:xfrm>
-          <a:prstGeom prst="rect">
-            <a:avLst/>
-          </a:prstGeom>
-          <a:noFill/>
-          <a:extLst>
-            <a:ext uri="{909E8E84-426E-40DD-AFC4-6F175D3DCCD1}">
-              <a14:hiddenFill xmlns:a14="http://schemas.microsoft.com/office/drawing/2010/main">
-                <a:solidFill>
-                  <a:srgbClr val="FFFFFF"/>
-                </a:solidFill>
-              </a14:hiddenFill>
-            </a:ext>
-          </a:extLst>
-        </p:spPr>
-      </p:pic>
-      <p:sp>
-        <p:nvSpPr>
-          <p:cNvPr id="7" name="ZoneTexte 6">
-            <a:extLst>
-              <a:ext uri="{FF2B5EF4-FFF2-40B4-BE49-F238E27FC236}">
-                <a16:creationId xmlns:a16="http://schemas.microsoft.com/office/drawing/2014/main" id="{4C9F4680-41D4-77D0-335A-D888A5366B10}"/>
-              </a:ext>
-            </a:extLst>
-          </p:cNvPr>
-          <p:cNvSpPr txBox="1"/>
-          <p:nvPr/>
-        </p:nvSpPr>
-        <p:spPr>
-          <a:xfrm>
-            <a:off x="7308220" y="309077"/>
-            <a:ext cx="3906559" cy="830997"/>
-          </a:xfrm>
-          <a:prstGeom prst="rect">
-            <a:avLst/>
-          </a:prstGeom>
-          <a:noFill/>
-        </p:spPr>
-        <p:txBody>
-          <a:bodyPr wrap="square" rtlCol="0">
-            <a:spAutoFit/>
-          </a:bodyPr>
-          <a:lstStyle/>
-          <a:p>
-            <a:r>
-              <a:rPr lang="en-US" sz="1600" b="1" dirty="0">
-                <a:solidFill>
-                  <a:srgbClr val="FF0000"/>
-                </a:solidFill>
-              </a:rPr>
-              <a:t>This dataset was not rarefied since we do not have raw counts (and thus library size) to do so.</a:t>
-            </a:r>
-          </a:p>
-        </p:txBody>
-      </p:sp>
-    </p:spTree>
-    <p:extLst>
-      <p:ext uri="{BB962C8B-B14F-4D97-AF65-F5344CB8AC3E}">
-        <p14:creationId xmlns:p14="http://schemas.microsoft.com/office/powerpoint/2010/main" val="2559556003"/>
-      </p:ext>
-    </p:extLst>
-  </p:cSld>
-  <p:clrMapOvr>
-    <a:masterClrMapping/>
-  </p:clrMapOvr>
-</p:sld>
-</file>
-
-<file path=ppt/slides/slide14.xml><?xml version="1.0" encoding="utf-8"?>
-<p:sld xmlns:a="http://schemas.openxmlformats.org/drawingml/2006/main" xmlns:r="http://schemas.openxmlformats.org/officeDocument/2006/relationships" xmlns:p="http://schemas.openxmlformats.org/presentationml/2006/main">
-  <p:cSld>
-    <p:spTree>
-      <p:nvGrpSpPr>
-        <p:cNvPr id="1" name="">
-          <a:extLst>
-            <a:ext uri="{FF2B5EF4-FFF2-40B4-BE49-F238E27FC236}">
-              <a16:creationId xmlns:a16="http://schemas.microsoft.com/office/drawing/2014/main" id="{01FC8C6C-EC36-AF60-586F-12C0730D89D1}"/>
-            </a:ext>
-          </a:extLst>
-        </p:cNvPr>
-        <p:cNvGrpSpPr/>
-        <p:nvPr/>
-      </p:nvGrpSpPr>
-      <p:grpSpPr>
-        <a:xfrm>
-          <a:off x="0" y="0"/>
-          <a:ext cx="0" cy="0"/>
-          <a:chOff x="0" y="0"/>
-          <a:chExt cx="0" cy="0"/>
-        </a:xfrm>
-      </p:grpSpPr>
-      <p:sp>
-        <p:nvSpPr>
-          <p:cNvPr id="2" name="Titre 1">
-            <a:extLst>
-              <a:ext uri="{FF2B5EF4-FFF2-40B4-BE49-F238E27FC236}">
-                <a16:creationId xmlns:a16="http://schemas.microsoft.com/office/drawing/2014/main" id="{E9BC35B4-77A6-2649-BC6C-3D71CE55642C}"/>
-              </a:ext>
-            </a:extLst>
-          </p:cNvPr>
-          <p:cNvSpPr>
-            <a:spLocks noGrp="1"/>
-          </p:cNvSpPr>
-          <p:nvPr>
-            <p:ph type="title"/>
-          </p:nvPr>
-        </p:nvSpPr>
-        <p:spPr>
-          <a:xfrm>
-            <a:off x="244887" y="197602"/>
-            <a:ext cx="10515600" cy="598136"/>
-          </a:xfrm>
-        </p:spPr>
-        <p:txBody>
-          <a:bodyPr>
-            <a:normAutofit/>
-          </a:bodyPr>
-          <a:lstStyle/>
-          <a:p>
-            <a:r>
-              <a:rPr lang="en-US" sz="3000" dirty="0"/>
-              <a:t>CRC network inference with </a:t>
-            </a:r>
-            <a:r>
-              <a:rPr lang="en-US" sz="3000" dirty="0" err="1"/>
-              <a:t>FlashWeave</a:t>
-            </a:r>
-            <a:endParaRPr lang="en-US" sz="3000" dirty="0"/>
-          </a:p>
-        </p:txBody>
-      </p:sp>
-      <p:pic>
-        <p:nvPicPr>
-          <p:cNvPr id="9218" name="Picture 2">
-            <a:extLst>
-              <a:ext uri="{FF2B5EF4-FFF2-40B4-BE49-F238E27FC236}">
-                <a16:creationId xmlns:a16="http://schemas.microsoft.com/office/drawing/2014/main" id="{DB468735-A224-C75B-84E8-5D468B3D4A62}"/>
-              </a:ext>
-            </a:extLst>
-          </p:cNvPr>
-          <p:cNvPicPr>
-            <a:picLocks noChangeAspect="1" noChangeArrowheads="1"/>
-          </p:cNvPicPr>
-          <p:nvPr/>
-        </p:nvPicPr>
-        <p:blipFill>
-          <a:blip r:embed="rId2">
-            <a:extLst>
-              <a:ext uri="{28A0092B-C50C-407E-A947-70E740481C1C}">
-                <a14:useLocalDpi xmlns:a14="http://schemas.microsoft.com/office/drawing/2010/main" val="0"/>
-              </a:ext>
-            </a:extLst>
-          </a:blip>
-          <a:srcRect/>
-          <a:stretch>
-            <a:fillRect/>
-          </a:stretch>
-        </p:blipFill>
-        <p:spPr bwMode="auto">
-          <a:xfrm>
-            <a:off x="244887" y="795738"/>
-            <a:ext cx="4484987" cy="5766412"/>
-          </a:xfrm>
-          <a:prstGeom prst="rect">
-            <a:avLst/>
-          </a:prstGeom>
-          <a:noFill/>
-          <a:extLst>
-            <a:ext uri="{909E8E84-426E-40DD-AFC4-6F175D3DCCD1}">
-              <a14:hiddenFill xmlns:a14="http://schemas.microsoft.com/office/drawing/2010/main">
-                <a:solidFill>
-                  <a:srgbClr val="FFFFFF"/>
-                </a:solidFill>
-              </a14:hiddenFill>
-            </a:ext>
-          </a:extLst>
-        </p:spPr>
-      </p:pic>
-      <p:pic>
-        <p:nvPicPr>
-          <p:cNvPr id="9220" name="Picture 4">
-            <a:extLst>
-              <a:ext uri="{FF2B5EF4-FFF2-40B4-BE49-F238E27FC236}">
-                <a16:creationId xmlns:a16="http://schemas.microsoft.com/office/drawing/2014/main" id="{F55F55B4-2853-5C7B-859A-CADC2C6A32F6}"/>
-              </a:ext>
-            </a:extLst>
-          </p:cNvPr>
-          <p:cNvPicPr>
-            <a:picLocks noChangeAspect="1" noChangeArrowheads="1"/>
-          </p:cNvPicPr>
-          <p:nvPr/>
-        </p:nvPicPr>
-        <p:blipFill>
-          <a:blip r:embed="rId3">
-            <a:extLst>
-              <a:ext uri="{28A0092B-C50C-407E-A947-70E740481C1C}">
-                <a14:useLocalDpi xmlns:a14="http://schemas.microsoft.com/office/drawing/2010/main" val="0"/>
-              </a:ext>
-            </a:extLst>
-          </a:blip>
-          <a:srcRect/>
-          <a:stretch>
-            <a:fillRect/>
-          </a:stretch>
-        </p:blipFill>
-        <p:spPr bwMode="auto">
-          <a:xfrm>
-            <a:off x="6386285" y="715911"/>
-            <a:ext cx="5333073" cy="3809338"/>
-          </a:xfrm>
-          <a:prstGeom prst="rect">
-            <a:avLst/>
-          </a:prstGeom>
-          <a:noFill/>
-          <a:extLst>
-            <a:ext uri="{909E8E84-426E-40DD-AFC4-6F175D3DCCD1}">
-              <a14:hiddenFill xmlns:a14="http://schemas.microsoft.com/office/drawing/2010/main">
-                <a:solidFill>
-                  <a:srgbClr val="FFFFFF"/>
-                </a:solidFill>
-              </a14:hiddenFill>
-            </a:ext>
-          </a:extLst>
-        </p:spPr>
-      </p:pic>
-      <p:sp>
-        <p:nvSpPr>
-          <p:cNvPr id="3" name="ZoneTexte 2">
-            <a:extLst>
-              <a:ext uri="{FF2B5EF4-FFF2-40B4-BE49-F238E27FC236}">
-                <a16:creationId xmlns:a16="http://schemas.microsoft.com/office/drawing/2014/main" id="{F1013DC2-F522-8AED-A909-48EF056324C6}"/>
-              </a:ext>
-            </a:extLst>
-          </p:cNvPr>
-          <p:cNvSpPr txBox="1"/>
-          <p:nvPr/>
-        </p:nvSpPr>
-        <p:spPr>
-          <a:xfrm>
-            <a:off x="4004159" y="2711379"/>
-            <a:ext cx="1594798" cy="523220"/>
-          </a:xfrm>
-          <a:prstGeom prst="rect">
-            <a:avLst/>
-          </a:prstGeom>
-          <a:noFill/>
-        </p:spPr>
-        <p:txBody>
-          <a:bodyPr wrap="square" rtlCol="0">
-            <a:spAutoFit/>
-          </a:bodyPr>
-          <a:lstStyle/>
-          <a:p>
-            <a:r>
-              <a:rPr lang="en-US" sz="1400" dirty="0"/>
-              <a:t>PEP is lower in D, as in IBD dataset</a:t>
-            </a:r>
-          </a:p>
-        </p:txBody>
-      </p:sp>
-      <p:sp>
-        <p:nvSpPr>
-          <p:cNvPr id="4" name="ZoneTexte 3">
-            <a:extLst>
-              <a:ext uri="{FF2B5EF4-FFF2-40B4-BE49-F238E27FC236}">
-                <a16:creationId xmlns:a16="http://schemas.microsoft.com/office/drawing/2014/main" id="{05FF9D73-634A-F01C-8085-1154E77B8669}"/>
-              </a:ext>
-            </a:extLst>
-          </p:cNvPr>
-          <p:cNvSpPr txBox="1"/>
-          <p:nvPr/>
-        </p:nvSpPr>
-        <p:spPr>
-          <a:xfrm>
-            <a:off x="4004159" y="5476351"/>
-            <a:ext cx="1968469" cy="307777"/>
-          </a:xfrm>
-          <a:prstGeom prst="rect">
-            <a:avLst/>
-          </a:prstGeom>
-          <a:noFill/>
-        </p:spPr>
-        <p:txBody>
-          <a:bodyPr wrap="square" rtlCol="0">
-            <a:spAutoFit/>
-          </a:bodyPr>
-          <a:lstStyle/>
-          <a:p>
-            <a:r>
-              <a:rPr lang="en-US" sz="1400" dirty="0"/>
-              <a:t>Evenness is higher in D</a:t>
-            </a:r>
-          </a:p>
-        </p:txBody>
-      </p:sp>
-      <p:sp>
-        <p:nvSpPr>
-          <p:cNvPr id="5" name="ZoneTexte 4">
-            <a:extLst>
-              <a:ext uri="{FF2B5EF4-FFF2-40B4-BE49-F238E27FC236}">
-                <a16:creationId xmlns:a16="http://schemas.microsoft.com/office/drawing/2014/main" id="{CFB67985-4227-8286-9A02-FBAD76A470F3}"/>
-              </a:ext>
-            </a:extLst>
-          </p:cNvPr>
-          <p:cNvSpPr txBox="1"/>
-          <p:nvPr/>
-        </p:nvSpPr>
-        <p:spPr>
-          <a:xfrm>
-            <a:off x="7449447" y="4525249"/>
-            <a:ext cx="3175010" cy="954107"/>
-          </a:xfrm>
-          <a:prstGeom prst="rect">
-            <a:avLst/>
-          </a:prstGeom>
-          <a:noFill/>
-        </p:spPr>
-        <p:txBody>
-          <a:bodyPr wrap="square" rtlCol="0">
-            <a:spAutoFit/>
-          </a:bodyPr>
-          <a:lstStyle/>
-          <a:p>
-            <a:r>
-              <a:rPr lang="en-US" sz="1400" dirty="0"/>
-              <a:t>Negative significant correlation between groups, but with PEP from healthy higher and evenness lower </a:t>
-            </a:r>
-            <a:r>
-              <a:rPr lang="en-US" sz="1400" dirty="0">
-                <a:highlight>
-                  <a:srgbClr val="FFFF00"/>
-                </a:highlight>
-              </a:rPr>
-              <a:t>(does it make sense?)</a:t>
-            </a:r>
-          </a:p>
-        </p:txBody>
-      </p:sp>
-    </p:spTree>
-    <p:extLst>
-      <p:ext uri="{BB962C8B-B14F-4D97-AF65-F5344CB8AC3E}">
-        <p14:creationId xmlns:p14="http://schemas.microsoft.com/office/powerpoint/2010/main" val="3469520601"/>
-      </p:ext>
-    </p:extLst>
-  </p:cSld>
-  <p:clrMapOvr>
-    <a:masterClrMapping/>
-  </p:clrMapOvr>
-</p:sld>
-</file>
-
-<file path=ppt/slides/slide15.xml><?xml version="1.0" encoding="utf-8"?>
-<p:sld xmlns:a="http://schemas.openxmlformats.org/drawingml/2006/main" xmlns:r="http://schemas.openxmlformats.org/officeDocument/2006/relationships" xmlns:p="http://schemas.openxmlformats.org/presentationml/2006/main">
-  <p:cSld>
-    <p:spTree>
-      <p:nvGrpSpPr>
-        <p:cNvPr id="1" name="">
-          <a:extLst>
-            <a:ext uri="{FF2B5EF4-FFF2-40B4-BE49-F238E27FC236}">
-              <a16:creationId xmlns:a16="http://schemas.microsoft.com/office/drawing/2014/main" id="{32190DAB-3C84-A475-8777-1BECADD2A064}"/>
-            </a:ext>
-          </a:extLst>
-        </p:cNvPr>
-        <p:cNvGrpSpPr/>
-        <p:nvPr/>
-      </p:nvGrpSpPr>
-      <p:grpSpPr>
-        <a:xfrm>
-          <a:off x="0" y="0"/>
-          <a:ext cx="0" cy="0"/>
-          <a:chOff x="0" y="0"/>
-          <a:chExt cx="0" cy="0"/>
-        </a:xfrm>
-      </p:grpSpPr>
-      <p:sp>
-        <p:nvSpPr>
-          <p:cNvPr id="2" name="Titre 1">
-            <a:extLst>
-              <a:ext uri="{FF2B5EF4-FFF2-40B4-BE49-F238E27FC236}">
-                <a16:creationId xmlns:a16="http://schemas.microsoft.com/office/drawing/2014/main" id="{ED7FC977-25AF-1606-80BA-E633F708FA1A}"/>
-              </a:ext>
-            </a:extLst>
-          </p:cNvPr>
-          <p:cNvSpPr>
-            <a:spLocks noGrp="1"/>
-          </p:cNvSpPr>
-          <p:nvPr>
-            <p:ph type="title"/>
-          </p:nvPr>
-        </p:nvSpPr>
-        <p:spPr>
-          <a:xfrm>
-            <a:off x="244887" y="197602"/>
-            <a:ext cx="10515600" cy="598136"/>
-          </a:xfrm>
-        </p:spPr>
-        <p:txBody>
-          <a:bodyPr>
-            <a:normAutofit/>
-          </a:bodyPr>
-          <a:lstStyle/>
-          <a:p>
-            <a:r>
-              <a:rPr lang="en-US" sz="3000" dirty="0"/>
-              <a:t>CRC network inference with </a:t>
-            </a:r>
-            <a:r>
-              <a:rPr lang="en-US" sz="3000" dirty="0" err="1"/>
-              <a:t>FlashWeave</a:t>
-            </a:r>
-            <a:r>
-              <a:rPr lang="en-US" sz="3000" dirty="0"/>
-              <a:t> (top taxa)</a:t>
-            </a:r>
-          </a:p>
-        </p:txBody>
-      </p:sp>
-      <p:pic>
-        <p:nvPicPr>
-          <p:cNvPr id="10242" name="Picture 2">
-            <a:extLst>
-              <a:ext uri="{FF2B5EF4-FFF2-40B4-BE49-F238E27FC236}">
-                <a16:creationId xmlns:a16="http://schemas.microsoft.com/office/drawing/2014/main" id="{2CCB75DE-837A-D4F5-43DF-4A0484454F0A}"/>
-              </a:ext>
-            </a:extLst>
-          </p:cNvPr>
-          <p:cNvPicPr>
-            <a:picLocks noChangeAspect="1" noChangeArrowheads="1"/>
-          </p:cNvPicPr>
-          <p:nvPr/>
-        </p:nvPicPr>
-        <p:blipFill>
-          <a:blip r:embed="rId2">
-            <a:extLst>
-              <a:ext uri="{28A0092B-C50C-407E-A947-70E740481C1C}">
-                <a14:useLocalDpi xmlns:a14="http://schemas.microsoft.com/office/drawing/2010/main" val="0"/>
-              </a:ext>
-            </a:extLst>
-          </a:blip>
-          <a:srcRect/>
-          <a:stretch>
-            <a:fillRect/>
-          </a:stretch>
-        </p:blipFill>
-        <p:spPr bwMode="auto">
-          <a:xfrm>
-            <a:off x="129041" y="875565"/>
-            <a:ext cx="4449804" cy="5721177"/>
-          </a:xfrm>
-          <a:prstGeom prst="rect">
-            <a:avLst/>
-          </a:prstGeom>
-          <a:noFill/>
-          <a:extLst>
-            <a:ext uri="{909E8E84-426E-40DD-AFC4-6F175D3DCCD1}">
-              <a14:hiddenFill xmlns:a14="http://schemas.microsoft.com/office/drawing/2010/main">
-                <a:solidFill>
-                  <a:srgbClr val="FFFFFF"/>
-                </a:solidFill>
-              </a14:hiddenFill>
-            </a:ext>
-          </a:extLst>
-        </p:spPr>
-      </p:pic>
-      <p:pic>
-        <p:nvPicPr>
-          <p:cNvPr id="10244" name="Picture 4">
-            <a:extLst>
-              <a:ext uri="{FF2B5EF4-FFF2-40B4-BE49-F238E27FC236}">
-                <a16:creationId xmlns:a16="http://schemas.microsoft.com/office/drawing/2014/main" id="{ED182071-8690-F7F3-E576-BB53BF8D5917}"/>
-              </a:ext>
-            </a:extLst>
-          </p:cNvPr>
-          <p:cNvPicPr>
-            <a:picLocks noChangeAspect="1" noChangeArrowheads="1"/>
-          </p:cNvPicPr>
-          <p:nvPr/>
-        </p:nvPicPr>
-        <p:blipFill>
-          <a:blip r:embed="rId3">
-            <a:extLst>
-              <a:ext uri="{28A0092B-C50C-407E-A947-70E740481C1C}">
-                <a14:useLocalDpi xmlns:a14="http://schemas.microsoft.com/office/drawing/2010/main" val="0"/>
-              </a:ext>
-            </a:extLst>
-          </a:blip>
-          <a:srcRect/>
-          <a:stretch>
-            <a:fillRect/>
-          </a:stretch>
-        </p:blipFill>
-        <p:spPr bwMode="auto">
-          <a:xfrm>
-            <a:off x="6509220" y="694139"/>
-            <a:ext cx="5606806" cy="4004862"/>
-          </a:xfrm>
-          <a:prstGeom prst="rect">
-            <a:avLst/>
-          </a:prstGeom>
-          <a:noFill/>
-          <a:extLst>
-            <a:ext uri="{909E8E84-426E-40DD-AFC4-6F175D3DCCD1}">
-              <a14:hiddenFill xmlns:a14="http://schemas.microsoft.com/office/drawing/2010/main">
-                <a:solidFill>
-                  <a:srgbClr val="FFFFFF"/>
-                </a:solidFill>
-              </a14:hiddenFill>
-            </a:ext>
-          </a:extLst>
-        </p:spPr>
-      </p:pic>
-      <p:sp>
-        <p:nvSpPr>
-          <p:cNvPr id="3" name="ZoneTexte 2">
-            <a:extLst>
-              <a:ext uri="{FF2B5EF4-FFF2-40B4-BE49-F238E27FC236}">
-                <a16:creationId xmlns:a16="http://schemas.microsoft.com/office/drawing/2014/main" id="{7F464BD5-365D-63CE-F295-07BA0F55711E}"/>
-              </a:ext>
-            </a:extLst>
-          </p:cNvPr>
-          <p:cNvSpPr txBox="1"/>
-          <p:nvPr/>
-        </p:nvSpPr>
-        <p:spPr>
-          <a:xfrm>
-            <a:off x="3837245" y="2624294"/>
-            <a:ext cx="1594798" cy="954107"/>
-          </a:xfrm>
-          <a:prstGeom prst="rect">
-            <a:avLst/>
-          </a:prstGeom>
-          <a:noFill/>
-        </p:spPr>
-        <p:txBody>
-          <a:bodyPr wrap="square" rtlCol="0">
-            <a:spAutoFit/>
-          </a:bodyPr>
-          <a:lstStyle/>
-          <a:p>
-            <a:r>
-              <a:rPr lang="en-US" sz="1400" dirty="0"/>
-              <a:t>PEP is still lower in D, but lower compared to CRC with all taxa</a:t>
-            </a:r>
-          </a:p>
-        </p:txBody>
-      </p:sp>
-      <p:sp>
-        <p:nvSpPr>
-          <p:cNvPr id="4" name="ZoneTexte 3">
-            <a:extLst>
-              <a:ext uri="{FF2B5EF4-FFF2-40B4-BE49-F238E27FC236}">
-                <a16:creationId xmlns:a16="http://schemas.microsoft.com/office/drawing/2014/main" id="{B0E94724-1AAD-8BCD-CCEB-2016AE0F524E}"/>
-              </a:ext>
-            </a:extLst>
-          </p:cNvPr>
-          <p:cNvSpPr txBox="1"/>
-          <p:nvPr/>
-        </p:nvSpPr>
-        <p:spPr>
-          <a:xfrm>
-            <a:off x="3907889" y="5459215"/>
-            <a:ext cx="1594798" cy="523220"/>
-          </a:xfrm>
-          <a:prstGeom prst="rect">
-            <a:avLst/>
-          </a:prstGeom>
-          <a:noFill/>
-        </p:spPr>
-        <p:txBody>
-          <a:bodyPr wrap="square" rtlCol="0">
-            <a:spAutoFit/>
-          </a:bodyPr>
-          <a:lstStyle/>
-          <a:p>
-            <a:r>
-              <a:rPr lang="en-US" sz="1400" dirty="0"/>
-              <a:t>Evenness is still higher in D</a:t>
-            </a:r>
-          </a:p>
-        </p:txBody>
-      </p:sp>
-      <p:sp>
-        <p:nvSpPr>
-          <p:cNvPr id="5" name="ZoneTexte 4">
-            <a:extLst>
-              <a:ext uri="{FF2B5EF4-FFF2-40B4-BE49-F238E27FC236}">
-                <a16:creationId xmlns:a16="http://schemas.microsoft.com/office/drawing/2014/main" id="{242304D5-9394-99B1-6D03-BDAE8A20C2A4}"/>
-              </a:ext>
-            </a:extLst>
-          </p:cNvPr>
-          <p:cNvSpPr txBox="1"/>
-          <p:nvPr/>
-        </p:nvSpPr>
-        <p:spPr>
-          <a:xfrm>
-            <a:off x="7812232" y="4699001"/>
-            <a:ext cx="3363768" cy="307777"/>
-          </a:xfrm>
-          <a:prstGeom prst="rect">
-            <a:avLst/>
-          </a:prstGeom>
-          <a:noFill/>
-        </p:spPr>
-        <p:txBody>
-          <a:bodyPr wrap="square" rtlCol="0">
-            <a:spAutoFit/>
-          </a:bodyPr>
-          <a:lstStyle/>
-          <a:p>
-            <a:r>
-              <a:rPr lang="en-US" sz="1400" dirty="0"/>
-              <a:t>Same trend when taking top taxa</a:t>
-            </a:r>
-          </a:p>
-        </p:txBody>
-      </p:sp>
-    </p:spTree>
-    <p:extLst>
-      <p:ext uri="{BB962C8B-B14F-4D97-AF65-F5344CB8AC3E}">
-        <p14:creationId xmlns:p14="http://schemas.microsoft.com/office/powerpoint/2010/main" val="1881367386"/>
-      </p:ext>
-    </p:extLst>
-  </p:cSld>
-  <p:clrMapOvr>
-    <a:masterClrMapping/>
-  </p:clrMapOvr>
-</p:sld>
-</file>
-
-<file path=ppt/slides/slide16.xml><?xml version="1.0" encoding="utf-8"?>
-<p:sld xmlns:a="http://schemas.openxmlformats.org/drawingml/2006/main" xmlns:r="http://schemas.openxmlformats.org/officeDocument/2006/relationships" xmlns:p="http://schemas.openxmlformats.org/presentationml/2006/main">
-  <p:cSld>
-    <p:spTree>
-      <p:nvGrpSpPr>
-        <p:cNvPr id="1" name="">
-          <a:extLst>
-            <a:ext uri="{FF2B5EF4-FFF2-40B4-BE49-F238E27FC236}">
               <a16:creationId xmlns:a16="http://schemas.microsoft.com/office/drawing/2014/main" id="{D324ED3D-C000-8200-BBFE-6AF8A77F374B}"/>
             </a:ext>
           </a:extLst>
@@ -7550,7 +5468,7 @@
 </p:sld>
 </file>
 
-<file path=ppt/slides/slide17.xml><?xml version="1.0" encoding="utf-8"?>
+<file path=ppt/slides/slide11.xml><?xml version="1.0" encoding="utf-8"?>
 <p:sld xmlns:a="http://schemas.openxmlformats.org/drawingml/2006/main" xmlns:r="http://schemas.openxmlformats.org/officeDocument/2006/relationships" xmlns:p="http://schemas.openxmlformats.org/presentationml/2006/main">
   <p:cSld>
     <p:spTree>
@@ -7758,7 +5676,7 @@
 </p:sld>
 </file>
 
-<file path=ppt/slides/slide18.xml><?xml version="1.0" encoding="utf-8"?>
+<file path=ppt/slides/slide12.xml><?xml version="1.0" encoding="utf-8"?>
 <p:sld xmlns:a="http://schemas.openxmlformats.org/drawingml/2006/main" xmlns:r="http://schemas.openxmlformats.org/officeDocument/2006/relationships" xmlns:p="http://schemas.openxmlformats.org/presentationml/2006/main">
   <p:cSld>
     <p:spTree>
@@ -8328,573 +6246,6 @@
         <p:cNvPr id="1" name="">
           <a:extLst>
             <a:ext uri="{FF2B5EF4-FFF2-40B4-BE49-F238E27FC236}">
-              <a16:creationId xmlns:a16="http://schemas.microsoft.com/office/drawing/2014/main" id="{4780926F-F73B-B911-3907-15445977C5E1}"/>
-            </a:ext>
-          </a:extLst>
-        </p:cNvPr>
-        <p:cNvGrpSpPr/>
-        <p:nvPr/>
-      </p:nvGrpSpPr>
-      <p:grpSpPr>
-        <a:xfrm>
-          <a:off x="0" y="0"/>
-          <a:ext cx="0" cy="0"/>
-          <a:chOff x="0" y="0"/>
-          <a:chExt cx="0" cy="0"/>
-        </a:xfrm>
-      </p:grpSpPr>
-      <p:sp>
-        <p:nvSpPr>
-          <p:cNvPr id="2" name="Titre 1">
-            <a:extLst>
-              <a:ext uri="{FF2B5EF4-FFF2-40B4-BE49-F238E27FC236}">
-                <a16:creationId xmlns:a16="http://schemas.microsoft.com/office/drawing/2014/main" id="{7B52301A-F8AA-51F7-29CA-9DF12DDA2465}"/>
-              </a:ext>
-            </a:extLst>
-          </p:cNvPr>
-          <p:cNvSpPr>
-            <a:spLocks noGrp="1"/>
-          </p:cNvSpPr>
-          <p:nvPr>
-            <p:ph type="title"/>
-          </p:nvPr>
-        </p:nvSpPr>
-        <p:spPr>
-          <a:xfrm>
-            <a:off x="244887" y="197602"/>
-            <a:ext cx="10515600" cy="598136"/>
-          </a:xfrm>
-        </p:spPr>
-        <p:txBody>
-          <a:bodyPr>
-            <a:normAutofit/>
-          </a:bodyPr>
-          <a:lstStyle/>
-          <a:p>
-            <a:r>
-              <a:rPr lang="en-US" sz="3000" dirty="0"/>
-              <a:t>IBD network inference with </a:t>
-            </a:r>
-            <a:r>
-              <a:rPr lang="en-US" sz="3000" dirty="0" err="1"/>
-              <a:t>FlashWeave</a:t>
-            </a:r>
-            <a:endParaRPr lang="en-US" sz="3000" dirty="0"/>
-          </a:p>
-        </p:txBody>
-      </p:sp>
-      <p:pic>
-        <p:nvPicPr>
-          <p:cNvPr id="1026" name="Picture 2">
-            <a:extLst>
-              <a:ext uri="{FF2B5EF4-FFF2-40B4-BE49-F238E27FC236}">
-                <a16:creationId xmlns:a16="http://schemas.microsoft.com/office/drawing/2014/main" id="{301B7F09-094B-4157-B891-FF19B5BE586A}"/>
-              </a:ext>
-            </a:extLst>
-          </p:cNvPr>
-          <p:cNvPicPr>
-            <a:picLocks noChangeAspect="1" noChangeArrowheads="1"/>
-          </p:cNvPicPr>
-          <p:nvPr/>
-        </p:nvPicPr>
-        <p:blipFill>
-          <a:blip r:embed="rId2">
-            <a:extLst>
-              <a:ext uri="{28A0092B-C50C-407E-A947-70E740481C1C}">
-                <a14:useLocalDpi xmlns:a14="http://schemas.microsoft.com/office/drawing/2010/main" val="0"/>
-              </a:ext>
-            </a:extLst>
-          </a:blip>
-          <a:srcRect/>
-          <a:stretch>
-            <a:fillRect/>
-          </a:stretch>
-        </p:blipFill>
-        <p:spPr bwMode="auto">
-          <a:xfrm>
-            <a:off x="385877" y="795738"/>
-            <a:ext cx="4625036" cy="5946474"/>
-          </a:xfrm>
-          <a:prstGeom prst="rect">
-            <a:avLst/>
-          </a:prstGeom>
-          <a:noFill/>
-          <a:extLst>
-            <a:ext uri="{909E8E84-426E-40DD-AFC4-6F175D3DCCD1}">
-              <a14:hiddenFill xmlns:a14="http://schemas.microsoft.com/office/drawing/2010/main">
-                <a:solidFill>
-                  <a:srgbClr val="FFFFFF"/>
-                </a:solidFill>
-              </a14:hiddenFill>
-            </a:ext>
-          </a:extLst>
-        </p:spPr>
-      </p:pic>
-      <p:pic>
-        <p:nvPicPr>
-          <p:cNvPr id="1028" name="Picture 4">
-            <a:extLst>
-              <a:ext uri="{FF2B5EF4-FFF2-40B4-BE49-F238E27FC236}">
-                <a16:creationId xmlns:a16="http://schemas.microsoft.com/office/drawing/2014/main" id="{7316BD46-60E9-08C0-D580-D7F5C684D77A}"/>
-              </a:ext>
-            </a:extLst>
-          </p:cNvPr>
-          <p:cNvPicPr>
-            <a:picLocks noChangeAspect="1" noChangeArrowheads="1"/>
-          </p:cNvPicPr>
-          <p:nvPr/>
-        </p:nvPicPr>
-        <p:blipFill>
-          <a:blip r:embed="rId3">
-            <a:extLst>
-              <a:ext uri="{28A0092B-C50C-407E-A947-70E740481C1C}">
-                <a14:useLocalDpi xmlns:a14="http://schemas.microsoft.com/office/drawing/2010/main" val="0"/>
-              </a:ext>
-            </a:extLst>
-          </a:blip>
-          <a:srcRect/>
-          <a:stretch>
-            <a:fillRect/>
-          </a:stretch>
-        </p:blipFill>
-        <p:spPr bwMode="auto">
-          <a:xfrm>
-            <a:off x="6096000" y="795738"/>
-            <a:ext cx="5747624" cy="4105446"/>
-          </a:xfrm>
-          <a:prstGeom prst="rect">
-            <a:avLst/>
-          </a:prstGeom>
-          <a:noFill/>
-          <a:extLst>
-            <a:ext uri="{909E8E84-426E-40DD-AFC4-6F175D3DCCD1}">
-              <a14:hiddenFill xmlns:a14="http://schemas.microsoft.com/office/drawing/2010/main">
-                <a:solidFill>
-                  <a:srgbClr val="FFFFFF"/>
-                </a:solidFill>
-              </a14:hiddenFill>
-            </a:ext>
-          </a:extLst>
-        </p:spPr>
-      </p:pic>
-      <p:sp>
-        <p:nvSpPr>
-          <p:cNvPr id="4" name="ZoneTexte 3">
-            <a:extLst>
-              <a:ext uri="{FF2B5EF4-FFF2-40B4-BE49-F238E27FC236}">
-                <a16:creationId xmlns:a16="http://schemas.microsoft.com/office/drawing/2014/main" id="{CA4F7170-6C56-5ECE-3F9C-6A237B776744}"/>
-              </a:ext>
-            </a:extLst>
-          </p:cNvPr>
-          <p:cNvSpPr txBox="1"/>
-          <p:nvPr/>
-        </p:nvSpPr>
-        <p:spPr>
-          <a:xfrm>
-            <a:off x="4283079" y="5585208"/>
-            <a:ext cx="2304288" cy="954107"/>
-          </a:xfrm>
-          <a:prstGeom prst="rect">
-            <a:avLst/>
-          </a:prstGeom>
-          <a:noFill/>
-        </p:spPr>
-        <p:txBody>
-          <a:bodyPr wrap="square" rtlCol="0">
-            <a:spAutoFit/>
-          </a:bodyPr>
-          <a:lstStyle/>
-          <a:p>
-            <a:r>
-              <a:rPr lang="en-US" sz="1400" dirty="0"/>
-              <a:t>In healthy cohorts (at least for the gut microbiota), we expect higher evenness, so the results make sense.</a:t>
-            </a:r>
-          </a:p>
-        </p:txBody>
-      </p:sp>
-      <p:sp>
-        <p:nvSpPr>
-          <p:cNvPr id="3" name="ZoneTexte 2">
-            <a:extLst>
-              <a:ext uri="{FF2B5EF4-FFF2-40B4-BE49-F238E27FC236}">
-                <a16:creationId xmlns:a16="http://schemas.microsoft.com/office/drawing/2014/main" id="{AEA9F212-7648-F8B6-F195-D8DBD3BAA184}"/>
-              </a:ext>
-            </a:extLst>
-          </p:cNvPr>
-          <p:cNvSpPr txBox="1"/>
-          <p:nvPr/>
-        </p:nvSpPr>
-        <p:spPr>
-          <a:xfrm>
-            <a:off x="4233054" y="2624460"/>
-            <a:ext cx="1862945" cy="1169551"/>
-          </a:xfrm>
-          <a:prstGeom prst="rect">
-            <a:avLst/>
-          </a:prstGeom>
-          <a:noFill/>
-        </p:spPr>
-        <p:txBody>
-          <a:bodyPr wrap="square" rtlCol="0">
-            <a:spAutoFit/>
-          </a:bodyPr>
-          <a:lstStyle/>
-          <a:p>
-            <a:r>
-              <a:rPr lang="en-US" sz="1400" dirty="0"/>
-              <a:t>A small significant difference in PEP for 80% subsampling, with PEP constantly higher for D group.</a:t>
-            </a:r>
-          </a:p>
-        </p:txBody>
-      </p:sp>
-      <p:sp>
-        <p:nvSpPr>
-          <p:cNvPr id="5" name="ZoneTexte 4">
-            <a:extLst>
-              <a:ext uri="{FF2B5EF4-FFF2-40B4-BE49-F238E27FC236}">
-                <a16:creationId xmlns:a16="http://schemas.microsoft.com/office/drawing/2014/main" id="{07DCC246-569A-4AEF-7FE4-FF01555C724F}"/>
-              </a:ext>
-            </a:extLst>
-          </p:cNvPr>
-          <p:cNvSpPr txBox="1"/>
-          <p:nvPr/>
-        </p:nvSpPr>
-        <p:spPr>
-          <a:xfrm>
-            <a:off x="6712691" y="4975607"/>
-            <a:ext cx="4514241" cy="738664"/>
-          </a:xfrm>
-          <a:prstGeom prst="rect">
-            <a:avLst/>
-          </a:prstGeom>
-          <a:noFill/>
-        </p:spPr>
-        <p:txBody>
-          <a:bodyPr wrap="square" rtlCol="0">
-            <a:spAutoFit/>
-          </a:bodyPr>
-          <a:lstStyle/>
-          <a:p>
-            <a:r>
-              <a:rPr lang="en-US" sz="1400" dirty="0"/>
-              <a:t>By group, there is a significant positive correlation between PEP and Sheldon evenness, but no significant correlation between groups.</a:t>
-            </a:r>
-          </a:p>
-        </p:txBody>
-      </p:sp>
-    </p:spTree>
-    <p:extLst>
-      <p:ext uri="{BB962C8B-B14F-4D97-AF65-F5344CB8AC3E}">
-        <p14:creationId xmlns:p14="http://schemas.microsoft.com/office/powerpoint/2010/main" val="1332141955"/>
-      </p:ext>
-    </p:extLst>
-  </p:cSld>
-  <p:clrMapOvr>
-    <a:masterClrMapping/>
-  </p:clrMapOvr>
-</p:sld>
-</file>
-
-<file path=ppt/slides/slide4.xml><?xml version="1.0" encoding="utf-8"?>
-<p:sld xmlns:a="http://schemas.openxmlformats.org/drawingml/2006/main" xmlns:r="http://schemas.openxmlformats.org/officeDocument/2006/relationships" xmlns:p="http://schemas.openxmlformats.org/presentationml/2006/main">
-  <p:cSld>
-    <p:spTree>
-      <p:nvGrpSpPr>
-        <p:cNvPr id="1" name="">
-          <a:extLst>
-            <a:ext uri="{FF2B5EF4-FFF2-40B4-BE49-F238E27FC236}">
-              <a16:creationId xmlns:a16="http://schemas.microsoft.com/office/drawing/2014/main" id="{DF4B5AFF-60F6-67D3-1155-8D9301E02EB5}"/>
-            </a:ext>
-          </a:extLst>
-        </p:cNvPr>
-        <p:cNvGrpSpPr/>
-        <p:nvPr/>
-      </p:nvGrpSpPr>
-      <p:grpSpPr>
-        <a:xfrm>
-          <a:off x="0" y="0"/>
-          <a:ext cx="0" cy="0"/>
-          <a:chOff x="0" y="0"/>
-          <a:chExt cx="0" cy="0"/>
-        </a:xfrm>
-      </p:grpSpPr>
-      <p:sp>
-        <p:nvSpPr>
-          <p:cNvPr id="2" name="Titre 1">
-            <a:extLst>
-              <a:ext uri="{FF2B5EF4-FFF2-40B4-BE49-F238E27FC236}">
-                <a16:creationId xmlns:a16="http://schemas.microsoft.com/office/drawing/2014/main" id="{FBC84651-B0A3-009F-96AF-AB332FA4C7DE}"/>
-              </a:ext>
-            </a:extLst>
-          </p:cNvPr>
-          <p:cNvSpPr>
-            <a:spLocks noGrp="1"/>
-          </p:cNvSpPr>
-          <p:nvPr>
-            <p:ph type="title"/>
-          </p:nvPr>
-        </p:nvSpPr>
-        <p:spPr>
-          <a:xfrm>
-            <a:off x="244887" y="197602"/>
-            <a:ext cx="10515600" cy="598136"/>
-          </a:xfrm>
-        </p:spPr>
-        <p:txBody>
-          <a:bodyPr>
-            <a:normAutofit/>
-          </a:bodyPr>
-          <a:lstStyle/>
-          <a:p>
-            <a:r>
-              <a:rPr lang="en-US" sz="3000" dirty="0"/>
-              <a:t>IBD network inference with </a:t>
-            </a:r>
-            <a:r>
-              <a:rPr lang="en-US" sz="3000" dirty="0" err="1"/>
-              <a:t>FlashWeave</a:t>
-            </a:r>
-            <a:r>
-              <a:rPr lang="en-US" sz="3000" dirty="0"/>
-              <a:t> (for top taxa)</a:t>
-            </a:r>
-          </a:p>
-        </p:txBody>
-      </p:sp>
-      <p:pic>
-        <p:nvPicPr>
-          <p:cNvPr id="6146" name="Picture 2">
-            <a:extLst>
-              <a:ext uri="{FF2B5EF4-FFF2-40B4-BE49-F238E27FC236}">
-                <a16:creationId xmlns:a16="http://schemas.microsoft.com/office/drawing/2014/main" id="{0C741AD3-001B-7A01-8BBD-F9086B8D57E9}"/>
-              </a:ext>
-            </a:extLst>
-          </p:cNvPr>
-          <p:cNvPicPr>
-            <a:picLocks noChangeAspect="1" noChangeArrowheads="1"/>
-          </p:cNvPicPr>
-          <p:nvPr/>
-        </p:nvPicPr>
-        <p:blipFill>
-          <a:blip r:embed="rId3">
-            <a:extLst>
-              <a:ext uri="{28A0092B-C50C-407E-A947-70E740481C1C}">
-                <a14:useLocalDpi xmlns:a14="http://schemas.microsoft.com/office/drawing/2010/main" val="0"/>
-              </a:ext>
-            </a:extLst>
-          </a:blip>
-          <a:srcRect/>
-          <a:stretch>
-            <a:fillRect/>
-          </a:stretch>
-        </p:blipFill>
-        <p:spPr bwMode="auto">
-          <a:xfrm>
-            <a:off x="178849" y="851522"/>
-            <a:ext cx="4364921" cy="5612042"/>
-          </a:xfrm>
-          <a:prstGeom prst="rect">
-            <a:avLst/>
-          </a:prstGeom>
-          <a:noFill/>
-          <a:extLst>
-            <a:ext uri="{909E8E84-426E-40DD-AFC4-6F175D3DCCD1}">
-              <a14:hiddenFill xmlns:a14="http://schemas.microsoft.com/office/drawing/2010/main">
-                <a:solidFill>
-                  <a:srgbClr val="FFFFFF"/>
-                </a:solidFill>
-              </a14:hiddenFill>
-            </a:ext>
-          </a:extLst>
-        </p:spPr>
-      </p:pic>
-      <p:pic>
-        <p:nvPicPr>
-          <p:cNvPr id="6148" name="Picture 4">
-            <a:extLst>
-              <a:ext uri="{FF2B5EF4-FFF2-40B4-BE49-F238E27FC236}">
-                <a16:creationId xmlns:a16="http://schemas.microsoft.com/office/drawing/2014/main" id="{CFE13712-8DD6-8DD4-AC95-63FF9E7AAE96}"/>
-              </a:ext>
-            </a:extLst>
-          </p:cNvPr>
-          <p:cNvPicPr>
-            <a:picLocks noChangeAspect="1" noChangeArrowheads="1"/>
-          </p:cNvPicPr>
-          <p:nvPr/>
-        </p:nvPicPr>
-        <p:blipFill>
-          <a:blip r:embed="rId4">
-            <a:extLst>
-              <a:ext uri="{28A0092B-C50C-407E-A947-70E740481C1C}">
-                <a14:useLocalDpi xmlns:a14="http://schemas.microsoft.com/office/drawing/2010/main" val="0"/>
-              </a:ext>
-            </a:extLst>
-          </a:blip>
-          <a:srcRect/>
-          <a:stretch>
-            <a:fillRect/>
-          </a:stretch>
-        </p:blipFill>
-        <p:spPr bwMode="auto">
-          <a:xfrm>
-            <a:off x="6377305" y="690977"/>
-            <a:ext cx="5765686" cy="4118347"/>
-          </a:xfrm>
-          <a:prstGeom prst="rect">
-            <a:avLst/>
-          </a:prstGeom>
-          <a:noFill/>
-          <a:extLst>
-            <a:ext uri="{909E8E84-426E-40DD-AFC4-6F175D3DCCD1}">
-              <a14:hiddenFill xmlns:a14="http://schemas.microsoft.com/office/drawing/2010/main">
-                <a:solidFill>
-                  <a:srgbClr val="FFFFFF"/>
-                </a:solidFill>
-              </a14:hiddenFill>
-            </a:ext>
-          </a:extLst>
-        </p:spPr>
-      </p:pic>
-      <p:sp>
-        <p:nvSpPr>
-          <p:cNvPr id="3" name="ZoneTexte 2">
-            <a:extLst>
-              <a:ext uri="{FF2B5EF4-FFF2-40B4-BE49-F238E27FC236}">
-                <a16:creationId xmlns:a16="http://schemas.microsoft.com/office/drawing/2014/main" id="{B76B4ED6-0E93-5703-072E-542C27B35C3F}"/>
-              </a:ext>
-            </a:extLst>
-          </p:cNvPr>
-          <p:cNvSpPr txBox="1"/>
-          <p:nvPr/>
-        </p:nvSpPr>
-        <p:spPr>
-          <a:xfrm>
-            <a:off x="3860022" y="5314585"/>
-            <a:ext cx="1847187" cy="954107"/>
-          </a:xfrm>
-          <a:prstGeom prst="rect">
-            <a:avLst/>
-          </a:prstGeom>
-          <a:noFill/>
-        </p:spPr>
-        <p:txBody>
-          <a:bodyPr wrap="square" rtlCol="0">
-            <a:spAutoFit/>
-          </a:bodyPr>
-          <a:lstStyle/>
-          <a:p>
-            <a:r>
-              <a:rPr lang="en-US" sz="1400" dirty="0"/>
-              <a:t>Difference in evenness is exacerbated when considering top taxa.</a:t>
-            </a:r>
-          </a:p>
-        </p:txBody>
-      </p:sp>
-      <p:sp>
-        <p:nvSpPr>
-          <p:cNvPr id="4" name="ZoneTexte 3">
-            <a:extLst>
-              <a:ext uri="{FF2B5EF4-FFF2-40B4-BE49-F238E27FC236}">
-                <a16:creationId xmlns:a16="http://schemas.microsoft.com/office/drawing/2014/main" id="{2293FB24-706E-4F9D-2061-AE22908AE877}"/>
-              </a:ext>
-            </a:extLst>
-          </p:cNvPr>
-          <p:cNvSpPr txBox="1"/>
-          <p:nvPr/>
-        </p:nvSpPr>
-        <p:spPr>
-          <a:xfrm>
-            <a:off x="3860022" y="2666700"/>
-            <a:ext cx="2352315" cy="1384995"/>
-          </a:xfrm>
-          <a:prstGeom prst="rect">
-            <a:avLst/>
-          </a:prstGeom>
-          <a:noFill/>
-        </p:spPr>
-        <p:txBody>
-          <a:bodyPr wrap="square" rtlCol="0">
-            <a:spAutoFit/>
-          </a:bodyPr>
-          <a:lstStyle/>
-          <a:p>
-            <a:r>
-              <a:rPr lang="en-US" sz="1400" dirty="0"/>
-              <a:t>Trend in PEP is inverted when taking top taxa, suggesting that positive interactions occur between rare taxa </a:t>
-            </a:r>
-            <a:r>
-              <a:rPr lang="en-US" sz="1400" dirty="0">
-                <a:highlight>
-                  <a:srgbClr val="FFFF00"/>
-                </a:highlight>
-              </a:rPr>
-              <a:t>(is it corroborated in literature, I am not sure)</a:t>
-            </a:r>
-          </a:p>
-        </p:txBody>
-      </p:sp>
-      <p:sp>
-        <p:nvSpPr>
-          <p:cNvPr id="10" name="ZoneTexte 9">
-            <a:extLst>
-              <a:ext uri="{FF2B5EF4-FFF2-40B4-BE49-F238E27FC236}">
-                <a16:creationId xmlns:a16="http://schemas.microsoft.com/office/drawing/2014/main" id="{FB53E0B1-5140-D22E-279B-5277C4F1AFA9}"/>
-              </a:ext>
-            </a:extLst>
-          </p:cNvPr>
-          <p:cNvSpPr txBox="1"/>
-          <p:nvPr/>
-        </p:nvSpPr>
-        <p:spPr>
-          <a:xfrm>
-            <a:off x="7178694" y="4809324"/>
-            <a:ext cx="3745712" cy="1169551"/>
-          </a:xfrm>
-          <a:prstGeom prst="rect">
-            <a:avLst/>
-          </a:prstGeom>
-          <a:noFill/>
-        </p:spPr>
-        <p:txBody>
-          <a:bodyPr wrap="square" rtlCol="0">
-            <a:spAutoFit/>
-          </a:bodyPr>
-          <a:lstStyle/>
-          <a:p>
-            <a:r>
-              <a:rPr lang="en-US" sz="1400" dirty="0"/>
-              <a:t>This time, correlation between groups is statistically significant, but positive (and not negative as we expected),</a:t>
-            </a:r>
-          </a:p>
-          <a:p>
-            <a:r>
-              <a:rPr lang="en-US" sz="1400" dirty="0"/>
-              <a:t>Also, correlation intra-group between PEP and evenness is not significant anymore.</a:t>
-            </a:r>
-          </a:p>
-        </p:txBody>
-      </p:sp>
-    </p:spTree>
-    <p:extLst>
-      <p:ext uri="{BB962C8B-B14F-4D97-AF65-F5344CB8AC3E}">
-        <p14:creationId xmlns:p14="http://schemas.microsoft.com/office/powerpoint/2010/main" val="303723884"/>
-      </p:ext>
-    </p:extLst>
-  </p:cSld>
-  <p:clrMapOvr>
-    <a:masterClrMapping/>
-  </p:clrMapOvr>
-</p:sld>
-</file>
-
-<file path=ppt/slides/slide5.xml><?xml version="1.0" encoding="utf-8"?>
-<p:sld xmlns:a="http://schemas.openxmlformats.org/drawingml/2006/main" xmlns:r="http://schemas.openxmlformats.org/officeDocument/2006/relationships" xmlns:p="http://schemas.openxmlformats.org/presentationml/2006/main">
-  <p:cSld>
-    <p:spTree>
-      <p:nvGrpSpPr>
-        <p:cNvPr id="1" name="">
-          <a:extLst>
-            <a:ext uri="{FF2B5EF4-FFF2-40B4-BE49-F238E27FC236}">
               <a16:creationId xmlns:a16="http://schemas.microsoft.com/office/drawing/2014/main" id="{18C2680F-D7DA-06E1-FDE0-3834D46276A9}"/>
             </a:ext>
           </a:extLst>
@@ -8925,7 +6276,7 @@
           <p:nvPr/>
         </p:nvPicPr>
         <p:blipFill>
-          <a:blip r:embed="rId2">
+          <a:blip r:embed="rId3">
             <a:extLst>
               <a:ext uri="{28A0092B-C50C-407E-A947-70E740481C1C}">
                 <a14:useLocalDpi xmlns:a14="http://schemas.microsoft.com/office/drawing/2010/main" val="0"/>
@@ -9120,7 +6471,7 @@
           <p:nvPr/>
         </p:nvPicPr>
         <p:blipFill>
-          <a:blip r:embed="rId3">
+          <a:blip r:embed="rId4">
             <a:extLst>
               <a:ext uri="{28A0092B-C50C-407E-A947-70E740481C1C}">
                 <a14:useLocalDpi xmlns:a14="http://schemas.microsoft.com/office/drawing/2010/main" val="0"/>
@@ -9165,7 +6516,7 @@
 </p:sld>
 </file>
 
-<file path=ppt/slides/slide6.xml><?xml version="1.0" encoding="utf-8"?>
+<file path=ppt/slides/slide4.xml><?xml version="1.0" encoding="utf-8"?>
 <p:sld xmlns:a="http://schemas.openxmlformats.org/drawingml/2006/main" xmlns:r="http://schemas.openxmlformats.org/officeDocument/2006/relationships" xmlns:p="http://schemas.openxmlformats.org/presentationml/2006/main">
   <p:cSld>
     <p:spTree>
@@ -9449,7 +6800,7 @@
 </p:sld>
 </file>
 
-<file path=ppt/slides/slide7.xml><?xml version="1.0" encoding="utf-8"?>
+<file path=ppt/slides/slide5.xml><?xml version="1.0" encoding="utf-8"?>
 <p:sld xmlns:a="http://schemas.openxmlformats.org/drawingml/2006/main" xmlns:r="http://schemas.openxmlformats.org/officeDocument/2006/relationships" xmlns:p="http://schemas.openxmlformats.org/presentationml/2006/main">
   <p:cSld>
     <p:spTree>
@@ -9794,7 +7145,7 @@
 </p:sld>
 </file>
 
-<file path=ppt/slides/slide8.xml><?xml version="1.0" encoding="utf-8"?>
+<file path=ppt/slides/slide6.xml><?xml version="1.0" encoding="utf-8"?>
 <p:sld xmlns:a="http://schemas.openxmlformats.org/drawingml/2006/main" xmlns:r="http://schemas.openxmlformats.org/officeDocument/2006/relationships" xmlns:p="http://schemas.openxmlformats.org/presentationml/2006/main">
   <p:cSld>
     <p:spTree>
@@ -10149,7 +7500,7 @@
 </p:sld>
 </file>
 
-<file path=ppt/slides/slide9.xml><?xml version="1.0" encoding="utf-8"?>
+<file path=ppt/slides/slide7.xml><?xml version="1.0" encoding="utf-8"?>
 <p:sld xmlns:a="http://schemas.openxmlformats.org/drawingml/2006/main" xmlns:r="http://schemas.openxmlformats.org/officeDocument/2006/relationships" xmlns:p="http://schemas.openxmlformats.org/presentationml/2006/main">
   <p:cSld>
     <p:spTree>
@@ -10157,7 +7508,7 @@
         <p:cNvPr id="1" name="">
           <a:extLst>
             <a:ext uri="{FF2B5EF4-FFF2-40B4-BE49-F238E27FC236}">
-              <a16:creationId xmlns:a16="http://schemas.microsoft.com/office/drawing/2014/main" id="{68A1304E-DC95-58FA-4AC5-107D56EBA5C5}"/>
+              <a16:creationId xmlns:a16="http://schemas.microsoft.com/office/drawing/2014/main" id="{018B9280-0449-C322-5994-5FC27AA8BEE3}"/>
             </a:ext>
           </a:extLst>
         </p:cNvPr>
@@ -10172,52 +7523,12 @@
           <a:chExt cx="0" cy="0"/>
         </a:xfrm>
       </p:grpSpPr>
-      <p:sp>
-        <p:nvSpPr>
-          <p:cNvPr id="2" name="Titre 1">
-            <a:extLst>
-              <a:ext uri="{FF2B5EF4-FFF2-40B4-BE49-F238E27FC236}">
-                <a16:creationId xmlns:a16="http://schemas.microsoft.com/office/drawing/2014/main" id="{25E2DF66-7EC7-9642-42C6-AA3244FF293F}"/>
-              </a:ext>
-            </a:extLst>
-          </p:cNvPr>
-          <p:cNvSpPr>
-            <a:spLocks noGrp="1"/>
-          </p:cNvSpPr>
-          <p:nvPr>
-            <p:ph type="title"/>
-          </p:nvPr>
-        </p:nvSpPr>
-        <p:spPr>
-          <a:xfrm>
-            <a:off x="244887" y="197602"/>
-            <a:ext cx="10515600" cy="598136"/>
-          </a:xfrm>
-        </p:spPr>
-        <p:txBody>
-          <a:bodyPr>
-            <a:normAutofit/>
-          </a:bodyPr>
-          <a:lstStyle/>
-          <a:p>
-            <a:r>
-              <a:rPr lang="en-US" sz="3000" dirty="0"/>
-              <a:t>CDI network inference with </a:t>
-            </a:r>
-            <a:r>
-              <a:rPr lang="en-US" sz="3000" dirty="0" err="1"/>
-              <a:t>FlashWeave</a:t>
-            </a:r>
-            <a:endParaRPr lang="en-US" sz="3000" dirty="0"/>
-          </a:p>
-        </p:txBody>
-      </p:sp>
       <p:pic>
         <p:nvPicPr>
-          <p:cNvPr id="4102" name="Picture 6">
-            <a:extLst>
-              <a:ext uri="{FF2B5EF4-FFF2-40B4-BE49-F238E27FC236}">
-                <a16:creationId xmlns:a16="http://schemas.microsoft.com/office/drawing/2014/main" id="{799AB428-9642-69D6-0ACA-36F18C22C3C1}"/>
+          <p:cNvPr id="3074" name="Picture 2">
+            <a:extLst>
+              <a:ext uri="{FF2B5EF4-FFF2-40B4-BE49-F238E27FC236}">
+                <a16:creationId xmlns:a16="http://schemas.microsoft.com/office/drawing/2014/main" id="{04E87E40-8988-7E36-8310-CD0F9A991CDF}"/>
               </a:ext>
             </a:extLst>
           </p:cNvPr>
@@ -10241,8 +7552,329 @@
         </p:blipFill>
         <p:spPr bwMode="auto">
           <a:xfrm>
-            <a:off x="244887" y="795738"/>
-            <a:ext cx="4429353" cy="5694883"/>
+            <a:off x="244887" y="880174"/>
+            <a:ext cx="4220577" cy="5426457"/>
+          </a:xfrm>
+          <a:prstGeom prst="rect">
+            <a:avLst/>
+          </a:prstGeom>
+          <a:noFill/>
+          <a:extLst>
+            <a:ext uri="{909E8E84-426E-40DD-AFC4-6F175D3DCCD1}">
+              <a14:hiddenFill xmlns:a14="http://schemas.microsoft.com/office/drawing/2010/main">
+                <a:solidFill>
+                  <a:srgbClr val="FFFFFF"/>
+                </a:solidFill>
+              </a14:hiddenFill>
+            </a:ext>
+          </a:extLst>
+        </p:spPr>
+      </p:pic>
+      <p:sp>
+        <p:nvSpPr>
+          <p:cNvPr id="2" name="Titre 1">
+            <a:extLst>
+              <a:ext uri="{FF2B5EF4-FFF2-40B4-BE49-F238E27FC236}">
+                <a16:creationId xmlns:a16="http://schemas.microsoft.com/office/drawing/2014/main" id="{2684C5A3-7D0F-B05E-70BA-A2903296BF2D}"/>
+              </a:ext>
+            </a:extLst>
+          </p:cNvPr>
+          <p:cNvSpPr>
+            <a:spLocks noGrp="1"/>
+          </p:cNvSpPr>
+          <p:nvPr>
+            <p:ph type="title"/>
+          </p:nvPr>
+        </p:nvSpPr>
+        <p:spPr>
+          <a:xfrm>
+            <a:off x="244887" y="197602"/>
+            <a:ext cx="10515600" cy="598136"/>
+          </a:xfrm>
+        </p:spPr>
+        <p:txBody>
+          <a:bodyPr>
+            <a:normAutofit/>
+          </a:bodyPr>
+          <a:lstStyle/>
+          <a:p>
+            <a:r>
+              <a:rPr lang="en-US" sz="3000" dirty="0"/>
+              <a:t>CDI network inference with </a:t>
+            </a:r>
+            <a:r>
+              <a:rPr lang="en-US" sz="3000" dirty="0" err="1"/>
+              <a:t>FlashWeave</a:t>
+            </a:r>
+            <a:r>
+              <a:rPr lang="en-US" sz="3000" dirty="0"/>
+              <a:t> – prevalence inside loop </a:t>
+            </a:r>
+          </a:p>
+        </p:txBody>
+      </p:sp>
+      <p:sp>
+        <p:nvSpPr>
+          <p:cNvPr id="3" name="ZoneTexte 2">
+            <a:extLst>
+              <a:ext uri="{FF2B5EF4-FFF2-40B4-BE49-F238E27FC236}">
+                <a16:creationId xmlns:a16="http://schemas.microsoft.com/office/drawing/2014/main" id="{EAD0EE78-2F54-0553-B251-F4AD2AB6A5C7}"/>
+              </a:ext>
+            </a:extLst>
+          </p:cNvPr>
+          <p:cNvSpPr txBox="1"/>
+          <p:nvPr/>
+        </p:nvSpPr>
+        <p:spPr>
+          <a:xfrm>
+            <a:off x="3762838" y="2690336"/>
+            <a:ext cx="1663148" cy="523220"/>
+          </a:xfrm>
+          <a:prstGeom prst="rect">
+            <a:avLst/>
+          </a:prstGeom>
+          <a:noFill/>
+        </p:spPr>
+        <p:txBody>
+          <a:bodyPr wrap="square" rtlCol="0">
+            <a:spAutoFit/>
+          </a:bodyPr>
+          <a:lstStyle/>
+          <a:p>
+            <a:r>
+              <a:rPr lang="en-US" sz="1400" dirty="0"/>
+              <a:t>PEP is still higher for D group.</a:t>
+            </a:r>
+          </a:p>
+        </p:txBody>
+      </p:sp>
+      <p:pic>
+        <p:nvPicPr>
+          <p:cNvPr id="3076" name="Picture 4">
+            <a:extLst>
+              <a:ext uri="{FF2B5EF4-FFF2-40B4-BE49-F238E27FC236}">
+                <a16:creationId xmlns:a16="http://schemas.microsoft.com/office/drawing/2014/main" id="{5AD719FF-D9E4-172E-6017-6C5022ECF6AB}"/>
+              </a:ext>
+            </a:extLst>
+          </p:cNvPr>
+          <p:cNvPicPr>
+            <a:picLocks noChangeAspect="1" noChangeArrowheads="1"/>
+          </p:cNvPicPr>
+          <p:nvPr/>
+        </p:nvPicPr>
+        <p:blipFill>
+          <a:blip r:embed="rId3">
+            <a:extLst>
+              <a:ext uri="{28A0092B-C50C-407E-A947-70E740481C1C}">
+                <a14:useLocalDpi xmlns:a14="http://schemas.microsoft.com/office/drawing/2010/main" val="0"/>
+              </a:ext>
+            </a:extLst>
+          </a:blip>
+          <a:srcRect/>
+          <a:stretch>
+            <a:fillRect/>
+          </a:stretch>
+        </p:blipFill>
+        <p:spPr bwMode="auto">
+          <a:xfrm>
+            <a:off x="5793437" y="795738"/>
+            <a:ext cx="5825248" cy="4160891"/>
+          </a:xfrm>
+          <a:prstGeom prst="rect">
+            <a:avLst/>
+          </a:prstGeom>
+          <a:noFill/>
+          <a:extLst>
+            <a:ext uri="{909E8E84-426E-40DD-AFC4-6F175D3DCCD1}">
+              <a14:hiddenFill xmlns:a14="http://schemas.microsoft.com/office/drawing/2010/main">
+                <a:solidFill>
+                  <a:srgbClr val="FFFFFF"/>
+                </a:solidFill>
+              </a14:hiddenFill>
+            </a:ext>
+          </a:extLst>
+        </p:spPr>
+      </p:pic>
+      <p:sp>
+        <p:nvSpPr>
+          <p:cNvPr id="4" name="ZoneTexte 3">
+            <a:extLst>
+              <a:ext uri="{FF2B5EF4-FFF2-40B4-BE49-F238E27FC236}">
+                <a16:creationId xmlns:a16="http://schemas.microsoft.com/office/drawing/2014/main" id="{702E47EC-A6B5-8F76-C57C-4DCA9126CD34}"/>
+              </a:ext>
+            </a:extLst>
+          </p:cNvPr>
+          <p:cNvSpPr txBox="1"/>
+          <p:nvPr/>
+        </p:nvSpPr>
+        <p:spPr>
+          <a:xfrm>
+            <a:off x="3839539" y="5310164"/>
+            <a:ext cx="1663148" cy="954107"/>
+          </a:xfrm>
+          <a:prstGeom prst="rect">
+            <a:avLst/>
+          </a:prstGeom>
+          <a:noFill/>
+        </p:spPr>
+        <p:txBody>
+          <a:bodyPr wrap="square" rtlCol="0">
+            <a:spAutoFit/>
+          </a:bodyPr>
+          <a:lstStyle/>
+          <a:p>
+            <a:r>
+              <a:rPr lang="en-US" sz="1400" dirty="0"/>
+              <a:t>Sheldon evenness still consistent with the previous analysis</a:t>
+            </a:r>
+          </a:p>
+        </p:txBody>
+      </p:sp>
+      <p:sp>
+        <p:nvSpPr>
+          <p:cNvPr id="5" name="ZoneTexte 4">
+            <a:extLst>
+              <a:ext uri="{FF2B5EF4-FFF2-40B4-BE49-F238E27FC236}">
+                <a16:creationId xmlns:a16="http://schemas.microsoft.com/office/drawing/2014/main" id="{D9FA8990-E031-0F40-D079-8261D4971718}"/>
+              </a:ext>
+            </a:extLst>
+          </p:cNvPr>
+          <p:cNvSpPr txBox="1"/>
+          <p:nvPr/>
+        </p:nvSpPr>
+        <p:spPr>
+          <a:xfrm>
+            <a:off x="6296944" y="4898571"/>
+            <a:ext cx="5256428" cy="307777"/>
+          </a:xfrm>
+          <a:prstGeom prst="rect">
+            <a:avLst/>
+          </a:prstGeom>
+          <a:noFill/>
+        </p:spPr>
+        <p:txBody>
+          <a:bodyPr wrap="square" rtlCol="0">
+            <a:spAutoFit/>
+          </a:bodyPr>
+          <a:lstStyle/>
+          <a:p>
+            <a:r>
+              <a:rPr lang="en-US" sz="1400" dirty="0"/>
+              <a:t>We also have a significant positive correlation between groups</a:t>
+            </a:r>
+          </a:p>
+        </p:txBody>
+      </p:sp>
+    </p:spTree>
+    <p:extLst>
+      <p:ext uri="{BB962C8B-B14F-4D97-AF65-F5344CB8AC3E}">
+        <p14:creationId xmlns:p14="http://schemas.microsoft.com/office/powerpoint/2010/main" val="3413155239"/>
+      </p:ext>
+    </p:extLst>
+  </p:cSld>
+  <p:clrMapOvr>
+    <a:masterClrMapping/>
+  </p:clrMapOvr>
+</p:sld>
+</file>
+
+<file path=ppt/slides/slide8.xml><?xml version="1.0" encoding="utf-8"?>
+<p:sld xmlns:a="http://schemas.openxmlformats.org/drawingml/2006/main" xmlns:r="http://schemas.openxmlformats.org/officeDocument/2006/relationships" xmlns:p="http://schemas.openxmlformats.org/presentationml/2006/main">
+  <p:cSld>
+    <p:spTree>
+      <p:nvGrpSpPr>
+        <p:cNvPr id="1" name="">
+          <a:extLst>
+            <a:ext uri="{FF2B5EF4-FFF2-40B4-BE49-F238E27FC236}">
+              <a16:creationId xmlns:a16="http://schemas.microsoft.com/office/drawing/2014/main" id="{C8154EB7-1536-DEAE-C2B5-EC49D63CACD9}"/>
+            </a:ext>
+          </a:extLst>
+        </p:cNvPr>
+        <p:cNvGrpSpPr/>
+        <p:nvPr/>
+      </p:nvGrpSpPr>
+      <p:grpSpPr>
+        <a:xfrm>
+          <a:off x="0" y="0"/>
+          <a:ext cx="0" cy="0"/>
+          <a:chOff x="0" y="0"/>
+          <a:chExt cx="0" cy="0"/>
+        </a:xfrm>
+      </p:grpSpPr>
+      <p:sp>
+        <p:nvSpPr>
+          <p:cNvPr id="2" name="Titre 1">
+            <a:extLst>
+              <a:ext uri="{FF2B5EF4-FFF2-40B4-BE49-F238E27FC236}">
+                <a16:creationId xmlns:a16="http://schemas.microsoft.com/office/drawing/2014/main" id="{75086FF7-CBC7-2267-2361-8D3073A973BB}"/>
+              </a:ext>
+            </a:extLst>
+          </p:cNvPr>
+          <p:cNvSpPr>
+            <a:spLocks noGrp="1"/>
+          </p:cNvSpPr>
+          <p:nvPr>
+            <p:ph type="title"/>
+          </p:nvPr>
+        </p:nvSpPr>
+        <p:spPr>
+          <a:xfrm>
+            <a:off x="244887" y="197602"/>
+            <a:ext cx="10515600" cy="598136"/>
+          </a:xfrm>
+        </p:spPr>
+        <p:txBody>
+          <a:bodyPr>
+            <a:normAutofit fontScale="90000"/>
+          </a:bodyPr>
+          <a:lstStyle/>
+          <a:p>
+            <a:r>
+              <a:rPr lang="en-US" sz="3000" dirty="0"/>
+              <a:t>CDI network inference with </a:t>
+            </a:r>
+            <a:r>
+              <a:rPr lang="en-US" sz="3000" dirty="0" err="1"/>
+              <a:t>FlashWeave</a:t>
+            </a:r>
+            <a:r>
+              <a:rPr lang="en-US" sz="3000" dirty="0"/>
+              <a:t> (top taxa) – prevalence inside loop</a:t>
+            </a:r>
+          </a:p>
+        </p:txBody>
+      </p:sp>
+      <p:pic>
+        <p:nvPicPr>
+          <p:cNvPr id="4098" name="Picture 2">
+            <a:extLst>
+              <a:ext uri="{FF2B5EF4-FFF2-40B4-BE49-F238E27FC236}">
+                <a16:creationId xmlns:a16="http://schemas.microsoft.com/office/drawing/2014/main" id="{CF4DD222-BE7F-3847-43AD-DDDCF95BE276}"/>
+              </a:ext>
+            </a:extLst>
+          </p:cNvPr>
+          <p:cNvPicPr>
+            <a:picLocks noChangeAspect="1" noChangeArrowheads="1"/>
+          </p:cNvPicPr>
+          <p:nvPr/>
+        </p:nvPicPr>
+        <p:blipFill>
+          <a:blip r:embed="rId2">
+            <a:extLst>
+              <a:ext uri="{28A0092B-C50C-407E-A947-70E740481C1C}">
+                <a14:useLocalDpi xmlns:a14="http://schemas.microsoft.com/office/drawing/2010/main" val="0"/>
+              </a:ext>
+            </a:extLst>
+          </a:blip>
+          <a:srcRect/>
+          <a:stretch>
+            <a:fillRect/>
+          </a:stretch>
+        </p:blipFill>
+        <p:spPr bwMode="auto">
+          <a:xfrm>
+            <a:off x="97131" y="940881"/>
+            <a:ext cx="4303048" cy="5532491"/>
           </a:xfrm>
           <a:prstGeom prst="rect">
             <a:avLst/>
@@ -10261,10 +7893,10 @@
       </p:pic>
       <p:pic>
         <p:nvPicPr>
-          <p:cNvPr id="4104" name="Picture 8">
-            <a:extLst>
-              <a:ext uri="{FF2B5EF4-FFF2-40B4-BE49-F238E27FC236}">
-                <a16:creationId xmlns:a16="http://schemas.microsoft.com/office/drawing/2014/main" id="{23AC904C-12B3-F5AD-E334-3D22D9FF57E1}"/>
+          <p:cNvPr id="4100" name="Picture 4">
+            <a:extLst>
+              <a:ext uri="{FF2B5EF4-FFF2-40B4-BE49-F238E27FC236}">
+                <a16:creationId xmlns:a16="http://schemas.microsoft.com/office/drawing/2014/main" id="{72B79B0F-C86C-2578-B22A-F20F6FD00A3F}"/>
               </a:ext>
             </a:extLst>
           </p:cNvPr>
@@ -10288,8 +7920,8 @@
         </p:blipFill>
         <p:spPr bwMode="auto">
           <a:xfrm>
-            <a:off x="5640019" y="795738"/>
-            <a:ext cx="6010179" cy="4292985"/>
+            <a:off x="5827486" y="718720"/>
+            <a:ext cx="6119627" cy="4371162"/>
           </a:xfrm>
           <a:prstGeom prst="rect">
             <a:avLst/>
@@ -10311,7 +7943,7 @@
           <p:cNvPr id="3" name="ZoneTexte 2">
             <a:extLst>
               <a:ext uri="{FF2B5EF4-FFF2-40B4-BE49-F238E27FC236}">
-                <a16:creationId xmlns:a16="http://schemas.microsoft.com/office/drawing/2014/main" id="{CD5F1890-2008-5CC6-55F3-8F8B3E6FBD22}"/>
+                <a16:creationId xmlns:a16="http://schemas.microsoft.com/office/drawing/2014/main" id="{5798479D-B920-B59A-613C-AD83233C00DC}"/>
               </a:ext>
             </a:extLst>
           </p:cNvPr>
@@ -10320,8 +7952,8 @@
         </p:nvSpPr>
         <p:spPr>
           <a:xfrm>
-            <a:off x="3900723" y="5464313"/>
-            <a:ext cx="1663148" cy="738664"/>
+            <a:off x="3762838" y="2690336"/>
+            <a:ext cx="1663148" cy="523220"/>
           </a:xfrm>
           <a:prstGeom prst="rect">
             <a:avLst/>
@@ -10336,15 +7968,7 @@
           <a:p>
             <a:r>
               <a:rPr lang="en-US" sz="1400" dirty="0"/>
-              <a:t>We see a higher evenness for CDI samples, </a:t>
-            </a:r>
-            <a:r>
-              <a:rPr lang="en-US" sz="1400" dirty="0">
-                <a:highlight>
-                  <a:srgbClr val="FFFF00"/>
-                </a:highlight>
-              </a:rPr>
-              <a:t>why?</a:t>
+              <a:t>PEP is still higher for D group.</a:t>
             </a:r>
           </a:p>
         </p:txBody>
@@ -10354,7 +7978,7 @@
           <p:cNvPr id="4" name="ZoneTexte 3">
             <a:extLst>
               <a:ext uri="{FF2B5EF4-FFF2-40B4-BE49-F238E27FC236}">
-                <a16:creationId xmlns:a16="http://schemas.microsoft.com/office/drawing/2014/main" id="{4FBA2882-A80D-4215-791C-769A2FB068F1}"/>
+                <a16:creationId xmlns:a16="http://schemas.microsoft.com/office/drawing/2014/main" id="{C5482D35-EE77-F45A-91A8-182985F49687}"/>
               </a:ext>
             </a:extLst>
           </p:cNvPr>
@@ -10363,8 +7987,8 @@
         </p:nvSpPr>
         <p:spPr>
           <a:xfrm>
-            <a:off x="3837731" y="2715736"/>
-            <a:ext cx="1847187" cy="738664"/>
+            <a:off x="3701653" y="5440065"/>
+            <a:ext cx="1663148" cy="954107"/>
           </a:xfrm>
           <a:prstGeom prst="rect">
             <a:avLst/>
@@ -10379,7 +8003,7 @@
           <a:p>
             <a:r>
               <a:rPr lang="en-US" sz="1400" dirty="0"/>
-              <a:t>In here, PEP is higher for D, consistent with the Science paper</a:t>
+              <a:t>Sheldon evenness still consistent with the previous analysis</a:t>
             </a:r>
           </a:p>
         </p:txBody>
@@ -10389,7 +8013,7 @@
           <p:cNvPr id="5" name="ZoneTexte 4">
             <a:extLst>
               <a:ext uri="{FF2B5EF4-FFF2-40B4-BE49-F238E27FC236}">
-                <a16:creationId xmlns:a16="http://schemas.microsoft.com/office/drawing/2014/main" id="{0286D042-D30D-E25E-48A8-CF7C83DAA9C9}"/>
+                <a16:creationId xmlns:a16="http://schemas.microsoft.com/office/drawing/2014/main" id="{2BFCB613-32F5-8AEF-15DE-E6EFA5E15445}"/>
               </a:ext>
             </a:extLst>
           </p:cNvPr>
@@ -10398,8 +8022,8 @@
         </p:nvSpPr>
         <p:spPr>
           <a:xfrm>
-            <a:off x="6677212" y="5088723"/>
-            <a:ext cx="4193988" cy="307777"/>
+            <a:off x="6500433" y="5000264"/>
+            <a:ext cx="4393387" cy="307777"/>
           </a:xfrm>
           <a:prstGeom prst="rect">
             <a:avLst/>
@@ -10414,15 +8038,414 @@
           <a:p>
             <a:r>
               <a:rPr lang="en-US" sz="1400" dirty="0"/>
-              <a:t>Significant positive correlation between groups</a:t>
-            </a:r>
+              <a:t>Negative and significant correlation between groups</a:t>
+            </a:r>
+            <a:endParaRPr lang="en-US" sz="1400" dirty="0">
+              <a:highlight>
+                <a:srgbClr val="FFFF00"/>
+              </a:highlight>
+            </a:endParaRPr>
           </a:p>
         </p:txBody>
       </p:sp>
     </p:spTree>
     <p:extLst>
       <p:ext uri="{BB962C8B-B14F-4D97-AF65-F5344CB8AC3E}">
-        <p14:creationId xmlns:p14="http://schemas.microsoft.com/office/powerpoint/2010/main" val="2646711145"/>
+        <p14:creationId xmlns:p14="http://schemas.microsoft.com/office/powerpoint/2010/main" val="2748580013"/>
+      </p:ext>
+    </p:extLst>
+  </p:cSld>
+  <p:clrMapOvr>
+    <a:masterClrMapping/>
+  </p:clrMapOvr>
+</p:sld>
+</file>
+
+<file path=ppt/slides/slide9.xml><?xml version="1.0" encoding="utf-8"?>
+<p:sld xmlns:a="http://schemas.openxmlformats.org/drawingml/2006/main" xmlns:r="http://schemas.openxmlformats.org/officeDocument/2006/relationships" xmlns:p="http://schemas.openxmlformats.org/presentationml/2006/main">
+  <p:cSld>
+    <p:spTree>
+      <p:nvGrpSpPr>
+        <p:cNvPr id="1" name="">
+          <a:extLst>
+            <a:ext uri="{FF2B5EF4-FFF2-40B4-BE49-F238E27FC236}">
+              <a16:creationId xmlns:a16="http://schemas.microsoft.com/office/drawing/2014/main" id="{9B9F4AB1-ED0F-5A17-FF10-FB85322418A3}"/>
+            </a:ext>
+          </a:extLst>
+        </p:cNvPr>
+        <p:cNvGrpSpPr/>
+        <p:nvPr/>
+      </p:nvGrpSpPr>
+      <p:grpSpPr>
+        <a:xfrm>
+          <a:off x="0" y="0"/>
+          <a:ext cx="0" cy="0"/>
+          <a:chOff x="0" y="0"/>
+          <a:chExt cx="0" cy="0"/>
+        </a:xfrm>
+      </p:grpSpPr>
+      <p:sp>
+        <p:nvSpPr>
+          <p:cNvPr id="2" name="Titre 1">
+            <a:extLst>
+              <a:ext uri="{FF2B5EF4-FFF2-40B4-BE49-F238E27FC236}">
+                <a16:creationId xmlns:a16="http://schemas.microsoft.com/office/drawing/2014/main" id="{95B2D6AB-5609-6C5D-522D-193AEE6234F1}"/>
+              </a:ext>
+            </a:extLst>
+          </p:cNvPr>
+          <p:cNvSpPr>
+            <a:spLocks noGrp="1"/>
+          </p:cNvSpPr>
+          <p:nvPr>
+            <p:ph type="title"/>
+          </p:nvPr>
+        </p:nvSpPr>
+        <p:spPr>
+          <a:xfrm>
+            <a:off x="244887" y="197602"/>
+            <a:ext cx="10515600" cy="598136"/>
+          </a:xfrm>
+        </p:spPr>
+        <p:txBody>
+          <a:bodyPr>
+            <a:normAutofit/>
+          </a:bodyPr>
+          <a:lstStyle/>
+          <a:p>
+            <a:r>
+              <a:rPr lang="en-US" sz="3000" dirty="0"/>
+              <a:t>CRC network inference with </a:t>
+            </a:r>
+            <a:r>
+              <a:rPr lang="en-US" sz="3000" dirty="0" err="1"/>
+              <a:t>FlashWeave</a:t>
+            </a:r>
+            <a:endParaRPr lang="en-US" sz="3000" dirty="0"/>
+          </a:p>
+        </p:txBody>
+      </p:sp>
+      <p:sp>
+        <p:nvSpPr>
+          <p:cNvPr id="3" name="ZoneTexte 2">
+            <a:extLst>
+              <a:ext uri="{FF2B5EF4-FFF2-40B4-BE49-F238E27FC236}">
+                <a16:creationId xmlns:a16="http://schemas.microsoft.com/office/drawing/2014/main" id="{AC32ABF9-51F2-A954-BA0E-D802ADF51CDF}"/>
+              </a:ext>
+            </a:extLst>
+          </p:cNvPr>
+          <p:cNvSpPr txBox="1"/>
+          <p:nvPr/>
+        </p:nvSpPr>
+        <p:spPr>
+          <a:xfrm>
+            <a:off x="355988" y="1033063"/>
+            <a:ext cx="6952232" cy="2031325"/>
+          </a:xfrm>
+          <a:prstGeom prst="rect">
+            <a:avLst/>
+          </a:prstGeom>
+          <a:noFill/>
+        </p:spPr>
+        <p:txBody>
+          <a:bodyPr wrap="square" rtlCol="0">
+            <a:spAutoFit/>
+          </a:bodyPr>
+          <a:lstStyle/>
+          <a:p>
+            <a:pPr marL="285750" indent="-285750">
+              <a:buFontTx/>
+              <a:buChar char="-"/>
+            </a:pPr>
+            <a:r>
+              <a:rPr lang="en-US" dirty="0"/>
+              <a:t>Number of samples and taxa:</a:t>
+            </a:r>
+          </a:p>
+          <a:p>
+            <a:pPr marL="742950" lvl="1" indent="-285750">
+              <a:buFontTx/>
+              <a:buChar char="-"/>
+            </a:pPr>
+            <a:r>
+              <a:rPr lang="en-US" dirty="0"/>
+              <a:t>For control samples: 837 taxa and 251 samples</a:t>
+            </a:r>
+          </a:p>
+          <a:p>
+            <a:pPr marL="742950" lvl="1" indent="-285750">
+              <a:buFontTx/>
+              <a:buChar char="-"/>
+            </a:pPr>
+            <a:r>
+              <a:rPr lang="en-US" dirty="0"/>
+              <a:t>For diseased samples: 837 taxa and 324 samples</a:t>
+            </a:r>
+          </a:p>
+          <a:p>
+            <a:pPr marL="285750" indent="-285750">
+              <a:buFontTx/>
+              <a:buChar char="-"/>
+            </a:pPr>
+            <a:r>
+              <a:rPr lang="en-US" dirty="0"/>
+              <a:t>Prevalence filtering (5%): </a:t>
+            </a:r>
+          </a:p>
+          <a:p>
+            <a:pPr marL="285750" indent="-285750">
+              <a:buFontTx/>
+              <a:buChar char="-"/>
+            </a:pPr>
+            <a:r>
+              <a:rPr lang="en-US" dirty="0"/>
+              <a:t>Number of bootstrap iterations: 100</a:t>
+            </a:r>
+          </a:p>
+          <a:p>
+            <a:pPr marL="285750" indent="-285750">
+              <a:buFontTx/>
+              <a:buChar char="-"/>
+            </a:pPr>
+            <a:r>
+              <a:rPr lang="en-US" dirty="0"/>
+              <a:t>Subsampling percentages: 60% - 70% - 80%</a:t>
+            </a:r>
+          </a:p>
+          <a:p>
+            <a:pPr marL="285750" indent="-285750">
+              <a:buFontTx/>
+              <a:buChar char="-"/>
+            </a:pPr>
+            <a:endParaRPr lang="en-US" dirty="0"/>
+          </a:p>
+        </p:txBody>
+      </p:sp>
+      <p:sp>
+        <p:nvSpPr>
+          <p:cNvPr id="4" name="ZoneTexte 3">
+            <a:extLst>
+              <a:ext uri="{FF2B5EF4-FFF2-40B4-BE49-F238E27FC236}">
+                <a16:creationId xmlns:a16="http://schemas.microsoft.com/office/drawing/2014/main" id="{B9A25C61-5A35-2FA5-0AC5-16536A74C0F9}"/>
+              </a:ext>
+            </a:extLst>
+          </p:cNvPr>
+          <p:cNvSpPr txBox="1"/>
+          <p:nvPr/>
+        </p:nvSpPr>
+        <p:spPr>
+          <a:xfrm>
+            <a:off x="244887" y="729735"/>
+            <a:ext cx="3821880" cy="369332"/>
+          </a:xfrm>
+          <a:prstGeom prst="rect">
+            <a:avLst/>
+          </a:prstGeom>
+          <a:noFill/>
+        </p:spPr>
+        <p:txBody>
+          <a:bodyPr wrap="none" rtlCol="0">
+            <a:spAutoFit/>
+          </a:bodyPr>
+          <a:lstStyle/>
+          <a:p>
+            <a:r>
+              <a:rPr lang="en-US" b="1" dirty="0"/>
+              <a:t>Network construction with all taxa </a:t>
+            </a:r>
+          </a:p>
+        </p:txBody>
+      </p:sp>
+      <p:sp>
+        <p:nvSpPr>
+          <p:cNvPr id="5" name="ZoneTexte 4">
+            <a:extLst>
+              <a:ext uri="{FF2B5EF4-FFF2-40B4-BE49-F238E27FC236}">
+                <a16:creationId xmlns:a16="http://schemas.microsoft.com/office/drawing/2014/main" id="{BC8448B7-1823-23ED-79C8-20B2F3160092}"/>
+              </a:ext>
+            </a:extLst>
+          </p:cNvPr>
+          <p:cNvSpPr txBox="1"/>
+          <p:nvPr/>
+        </p:nvSpPr>
+        <p:spPr>
+          <a:xfrm>
+            <a:off x="303409" y="3003543"/>
+            <a:ext cx="3859198" cy="369332"/>
+          </a:xfrm>
+          <a:prstGeom prst="rect">
+            <a:avLst/>
+          </a:prstGeom>
+          <a:noFill/>
+        </p:spPr>
+        <p:txBody>
+          <a:bodyPr wrap="none" rtlCol="0">
+            <a:spAutoFit/>
+          </a:bodyPr>
+          <a:lstStyle/>
+          <a:p>
+            <a:r>
+              <a:rPr lang="en-US" b="1" dirty="0"/>
+              <a:t>Network construction with top taxa</a:t>
+            </a:r>
+          </a:p>
+        </p:txBody>
+      </p:sp>
+      <p:sp>
+        <p:nvSpPr>
+          <p:cNvPr id="6" name="ZoneTexte 5">
+            <a:extLst>
+              <a:ext uri="{FF2B5EF4-FFF2-40B4-BE49-F238E27FC236}">
+                <a16:creationId xmlns:a16="http://schemas.microsoft.com/office/drawing/2014/main" id="{7518BFAC-B611-2133-392F-4D6DA99F506A}"/>
+              </a:ext>
+            </a:extLst>
+          </p:cNvPr>
+          <p:cNvSpPr txBox="1"/>
+          <p:nvPr/>
+        </p:nvSpPr>
+        <p:spPr>
+          <a:xfrm>
+            <a:off x="4626846" y="3506731"/>
+            <a:ext cx="6952232" cy="1200329"/>
+          </a:xfrm>
+          <a:prstGeom prst="rect">
+            <a:avLst/>
+          </a:prstGeom>
+          <a:noFill/>
+        </p:spPr>
+        <p:txBody>
+          <a:bodyPr wrap="square" rtlCol="0">
+            <a:spAutoFit/>
+          </a:bodyPr>
+          <a:lstStyle/>
+          <a:p>
+            <a:pPr marL="285750" indent="-285750">
+              <a:buFontTx/>
+              <a:buChar char="-"/>
+            </a:pPr>
+            <a:r>
+              <a:rPr lang="en-US" dirty="0"/>
+              <a:t>Abundance filtering (top 1%): </a:t>
+            </a:r>
+          </a:p>
+          <a:p>
+            <a:pPr marL="285750" indent="-285750">
+              <a:buFontTx/>
+              <a:buChar char="-"/>
+            </a:pPr>
+            <a:r>
+              <a:rPr lang="en-US" dirty="0"/>
+              <a:t>Number of bootstrap iterations: 100</a:t>
+            </a:r>
+          </a:p>
+          <a:p>
+            <a:pPr marL="285750" indent="-285750">
+              <a:buFontTx/>
+              <a:buChar char="-"/>
+            </a:pPr>
+            <a:r>
+              <a:rPr lang="en-US" dirty="0"/>
+              <a:t>Subsampling percentages: 60% - 70% - 80%</a:t>
+            </a:r>
+          </a:p>
+          <a:p>
+            <a:pPr marL="285750" indent="-285750">
+              <a:buFontTx/>
+              <a:buChar char="-"/>
+            </a:pPr>
+            <a:endParaRPr lang="en-US" dirty="0"/>
+          </a:p>
+        </p:txBody>
+      </p:sp>
+      <p:pic>
+        <p:nvPicPr>
+          <p:cNvPr id="8194" name="Picture 2">
+            <a:extLst>
+              <a:ext uri="{FF2B5EF4-FFF2-40B4-BE49-F238E27FC236}">
+                <a16:creationId xmlns:a16="http://schemas.microsoft.com/office/drawing/2014/main" id="{2FC6A44B-F750-62F1-3BA8-D66AD12423D7}"/>
+              </a:ext>
+            </a:extLst>
+          </p:cNvPr>
+          <p:cNvPicPr>
+            <a:picLocks noChangeAspect="1" noChangeArrowheads="1"/>
+          </p:cNvPicPr>
+          <p:nvPr/>
+        </p:nvPicPr>
+        <p:blipFill>
+          <a:blip r:embed="rId2">
+            <a:extLst>
+              <a:ext uri="{28A0092B-C50C-407E-A947-70E740481C1C}">
+                <a14:useLocalDpi xmlns:a14="http://schemas.microsoft.com/office/drawing/2010/main" val="0"/>
+              </a:ext>
+            </a:extLst>
+          </a:blip>
+          <a:srcRect/>
+          <a:stretch>
+            <a:fillRect/>
+          </a:stretch>
+        </p:blipFill>
+        <p:spPr bwMode="auto">
+          <a:xfrm>
+            <a:off x="409334" y="3506731"/>
+            <a:ext cx="4159192" cy="2970851"/>
+          </a:xfrm>
+          <a:prstGeom prst="rect">
+            <a:avLst/>
+          </a:prstGeom>
+          <a:noFill/>
+          <a:extLst>
+            <a:ext uri="{909E8E84-426E-40DD-AFC4-6F175D3DCCD1}">
+              <a14:hiddenFill xmlns:a14="http://schemas.microsoft.com/office/drawing/2010/main">
+                <a:solidFill>
+                  <a:srgbClr val="FFFFFF"/>
+                </a:solidFill>
+              </a14:hiddenFill>
+            </a:ext>
+          </a:extLst>
+        </p:spPr>
+      </p:pic>
+      <p:sp>
+        <p:nvSpPr>
+          <p:cNvPr id="7" name="ZoneTexte 6">
+            <a:extLst>
+              <a:ext uri="{FF2B5EF4-FFF2-40B4-BE49-F238E27FC236}">
+                <a16:creationId xmlns:a16="http://schemas.microsoft.com/office/drawing/2014/main" id="{4C9F4680-41D4-77D0-335A-D888A5366B10}"/>
+              </a:ext>
+            </a:extLst>
+          </p:cNvPr>
+          <p:cNvSpPr txBox="1"/>
+          <p:nvPr/>
+        </p:nvSpPr>
+        <p:spPr>
+          <a:xfrm>
+            <a:off x="7308220" y="309077"/>
+            <a:ext cx="3906559" cy="830997"/>
+          </a:xfrm>
+          <a:prstGeom prst="rect">
+            <a:avLst/>
+          </a:prstGeom>
+          <a:noFill/>
+        </p:spPr>
+        <p:txBody>
+          <a:bodyPr wrap="square" rtlCol="0">
+            <a:spAutoFit/>
+          </a:bodyPr>
+          <a:lstStyle/>
+          <a:p>
+            <a:r>
+              <a:rPr lang="en-US" sz="1600" b="1" dirty="0">
+                <a:solidFill>
+                  <a:srgbClr val="FF0000"/>
+                </a:solidFill>
+              </a:rPr>
+              <a:t>This dataset was not rarefied since we do not have raw counts (and thus library size) to do so.</a:t>
+            </a:r>
+          </a:p>
+        </p:txBody>
+      </p:sp>
+    </p:spTree>
+    <p:extLst>
+      <p:ext uri="{BB962C8B-B14F-4D97-AF65-F5344CB8AC3E}">
+        <p14:creationId xmlns:p14="http://schemas.microsoft.com/office/powerpoint/2010/main" val="2559556003"/>
       </p:ext>
     </p:extLst>
   </p:cSld>
